--- a/8月5日に見せるスライド_更新版.pptx
+++ b/8月5日に見せるスライド_更新版.pptx
@@ -9,6 +9,7 @@
   </p:notesMasterIdLst>
   <p:sldIdLst>
     <p:sldId id="257" r:id="rId2"/>
+    <p:sldId id="269" r:id="rId16"/>
     <p:sldId id="262" r:id="rId9"/>
     <p:sldId id="263" r:id="rId10"/>
     <p:sldId id="264" r:id="rId11"/>
@@ -13323,6 +13324,95 @@
         <p14:creationId xmlns:p14="http://schemas.microsoft.com/office/powerpoint/2010/main" val="1024086991"/>
       </p:ext>
     </p:extLst>
+  </p:cSld>
+  <p:clrMapOvr>
+    <a:masterClrMapping/>
+  </p:clrMapOvr>
+</p:notes>
+</file>
+
+<file path=ppt/notesSlides/notesSlide10.xml><?xml version="1.0" encoding="utf-8"?>
+<p:notes xmlns:a="http://schemas.openxmlformats.org/drawingml/2006/main" xmlns:p="http://schemas.openxmlformats.org/presentationml/2006/main" xmlns:r="http://schemas.openxmlformats.org/officeDocument/2006/relationships">
+  <p:cSld>
+    <p:spTree>
+      <p:nvGrpSpPr>
+        <p:cNvPr id="1" name=""/>
+        <p:cNvGrpSpPr/>
+        <p:nvPr/>
+      </p:nvGrpSpPr>
+      <p:grpSpPr>
+        <a:xfrm>
+          <a:off x="0" y="0"/>
+          <a:ext cx="0" cy="0"/>
+          <a:chOff x="0" y="0"/>
+          <a:chExt cx="0" cy="0"/>
+        </a:xfrm>
+      </p:grpSpPr>
+      <p:sp>
+        <p:nvSpPr>
+          <p:cNvPr id="2" name="Notes Placeholder 1"/>
+          <p:cNvSpPr>
+            <a:spLocks noGrp="1"/>
+          </p:cNvSpPr>
+          <p:nvPr>
+            <p:ph type="body" idx="1"/>
+          </p:nvPr>
+        </p:nvSpPr>
+        <p:spPr/>
+        <p:txBody>
+          <a:bodyPr/>
+          <a:lstStyle/>
+          <a:p>
+            <a:r>
+              <a:t>【このスライドの存在理由】</a:t>
+            </a:r>
+          </a:p>
+          <a:p>
+            <a:r>
+              <a:t>結果2〜5では「改善訴えあり(n=9)」と「なし(n=20)」を比較する。その解釈の前提として、両群のベースライン背景（年齢・性別・認知機能・精神症状の記載）が大きく偏っていないかを示す必要がある。</a:t>
+            </a:r>
+          </a:p>
+          <a:p/>
+          <a:p>
+            <a:r>
+              <a:t>【結果】</a:t>
+            </a:r>
+          </a:p>
+          <a:p>
+            <a:r>
+              <a:t>年齢・性別・HDS-R・MoCA-J・CDR-SB・易怒性・意欲低下のいずれも、群間差はp&gt;0.3〜0.9の範囲で有意差はない。</a:t>
+            </a:r>
+          </a:p>
+          <a:p>
+            <a:r>
+              <a:t>MMSE合計点（0か月）のみp=0.086とやや低く、訴えあり群のほうが平均1.36点低い（22.89 対 24.25）。この差は結果3のスピーカーノートで既に言及している「6か月時点の一時的な上昇が平均への回帰と整合する」という留保の背景でもある。</a:t>
+            </a:r>
+          </a:p>
+          <a:p/>
+          <a:p>
+            <a:r>
+              <a:t>【値の出典についての補足】</a:t>
+            </a:r>
+          </a:p>
+          <a:p>
+            <a:r>
+              <a:t>年齢・性別・HDS-Rはxlsxに該当列がなく、結果1では長らく照合不能だった項目である。「レカネマブ患者ID一覧」を用いて今回初めて照合し、結果1の記載値と完全一致することを確認済み（詳細は output/患者ID一覧_照合チェック.md）。本スライドの値もこの照合済みの出典に基づく。</a:t>
+            </a:r>
+          </a:p>
+          <a:p/>
+          <a:p>
+            <a:r>
+              <a:t>【注意】</a:t>
+            </a:r>
+          </a:p>
+          <a:p>
+            <a:r>
+              <a:t>n=9 対 20 の小標本であり、背景に有意差が出ないことは「群が完全に同質である」ことの証明にはならない（検出力の限界）。あくまで結果2〜5を読む上での参考情報として提示する。</a:t>
+            </a:r>
+          </a:p>
+        </p:txBody>
+      </p:sp>
+    </p:spTree>
   </p:cSld>
   <p:clrMapOvr>
     <a:masterClrMapping/>
@@ -16398,6 +16488,2757 @@
                 <a:ea typeface="ＭＳ Ｐゴシック" panose="020B0600070205080204" pitchFamily="50" charset="-128"/>
               </a:rPr>
               <a:t>患者背景</a:t>
+            </a:r>
+          </a:p>
+        </p:txBody>
+      </p:sp>
+    </p:spTree>
+  </p:cSld>
+  <p:clrMapOvr>
+    <a:masterClrMapping/>
+  </p:clrMapOvr>
+</p:sld>
+</file>
+
+<file path=ppt/slides/slide10.xml><?xml version="1.0" encoding="utf-8"?>
+<p:sld xmlns:a="http://schemas.openxmlformats.org/drawingml/2006/main" xmlns:p="http://schemas.openxmlformats.org/presentationml/2006/main" xmlns:r="http://schemas.openxmlformats.org/officeDocument/2006/relationships">
+  <p:cSld>
+    <p:spTree>
+      <p:nvGrpSpPr>
+        <p:cNvPr id="1" name=""/>
+        <p:cNvGrpSpPr/>
+        <p:nvPr/>
+      </p:nvGrpSpPr>
+      <p:grpSpPr/>
+      <p:sp>
+        <p:nvSpPr>
+          <p:cNvPr id="2" name="TextBox 1"/>
+          <p:cNvSpPr txBox="1"/>
+          <p:nvPr/>
+        </p:nvSpPr>
+        <p:spPr>
+          <a:xfrm>
+            <a:off x="457200" y="292608"/>
+            <a:ext cx="11247120" cy="566928"/>
+          </a:xfrm>
+          <a:prstGeom prst="rect">
+            <a:avLst/>
+          </a:prstGeom>
+          <a:noFill/>
+        </p:spPr>
+        <p:txBody>
+          <a:bodyPr wrap="square" lIns="0" rIns="0" tIns="0" bIns="0">
+            <a:spAutoFit/>
+          </a:bodyPr>
+          <a:lstStyle/>
+          <a:p>
+            <a:pPr>
+              <a:lnSpc>
+                <a:spcPct val="105000"/>
+              </a:lnSpc>
+            </a:pPr>
+            <a:r>
+              <a:rPr sz="4000" b="0">
+                <a:solidFill>
+                  <a:srgbClr val="000000"/>
+                </a:solidFill>
+                <a:latin typeface="Arial"/>
+                <a:ea typeface="Arial"/>
+                <a:cs typeface="Arial"/>
+              </a:rPr>
+              <a:t>結果1-2</a:t>
+            </a:r>
+            <a:r>
+              <a:rPr sz="2600" b="0">
+                <a:solidFill>
+                  <a:srgbClr val="000000"/>
+                </a:solidFill>
+                <a:latin typeface="Arial"/>
+                <a:ea typeface="Arial"/>
+                <a:cs typeface="Arial"/>
+              </a:rPr>
+              <a:t>　患者背景（18か月観察例 N=29）</a:t>
+            </a:r>
+          </a:p>
+        </p:txBody>
+      </p:sp>
+      <p:cxnSp>
+        <p:nvCxnSpPr>
+          <p:cNvPr id="3" name="Connector 2"/>
+          <p:cNvCxnSpPr/>
+          <p:nvPr/>
+        </p:nvCxnSpPr>
+        <p:spPr>
+          <a:xfrm>
+            <a:off x="457200" y="1161288"/>
+            <a:ext cx="10817352" cy="0"/>
+          </a:xfrm>
+          <a:prstGeom prst="line">
+            <a:avLst/>
+          </a:prstGeom>
+          <a:ln w="22225">
+            <a:solidFill>
+              <a:srgbClr val="156082"/>
+            </a:solidFill>
+          </a:ln>
+        </p:spPr>
+        <p:style>
+          <a:lnRef idx="2">
+            <a:schemeClr val="accent1"/>
+          </a:lnRef>
+          <a:fillRef idx="0">
+            <a:schemeClr val="accent1"/>
+          </a:fillRef>
+          <a:effectRef idx="1">
+            <a:schemeClr val="accent1"/>
+          </a:effectRef>
+          <a:fontRef idx="minor">
+            <a:schemeClr val="tx1"/>
+          </a:fontRef>
+        </p:style>
+      </p:cxnSp>
+      <p:sp>
+        <p:nvSpPr>
+          <p:cNvPr id="4" name="TextBox 3"/>
+          <p:cNvSpPr txBox="1"/>
+          <p:nvPr/>
+        </p:nvSpPr>
+        <p:spPr>
+          <a:xfrm>
+            <a:off x="457200" y="1243584"/>
+            <a:ext cx="11247120" cy="246888"/>
+          </a:xfrm>
+          <a:prstGeom prst="rect">
+            <a:avLst/>
+          </a:prstGeom>
+          <a:noFill/>
+        </p:spPr>
+        <p:txBody>
+          <a:bodyPr wrap="square" lIns="0" rIns="0" tIns="0" bIns="0">
+            <a:spAutoFit/>
+          </a:bodyPr>
+          <a:lstStyle/>
+          <a:p>
+            <a:pPr>
+              <a:lnSpc>
+                <a:spcPct val="105000"/>
+              </a:lnSpc>
+            </a:pPr>
+            <a:r>
+              <a:rPr sz="1300" b="0">
+                <a:solidFill>
+                  <a:srgbClr val="666666"/>
+                </a:solidFill>
+                <a:latin typeface="Arial"/>
+                <a:ea typeface="Arial"/>
+                <a:cs typeface="Arial"/>
+              </a:rPr>
+              <a:t>この図の役割：結果2〜5で比較する2群（改善訴えあり n=9／なし n=20）の背景がベースライン時点で均衡していることを示す。</a:t>
+            </a:r>
+          </a:p>
+        </p:txBody>
+      </p:sp>
+      <p:sp>
+        <p:nvSpPr>
+          <p:cNvPr id="5" name="Rectangle 4"/>
+          <p:cNvSpPr/>
+          <p:nvPr/>
+        </p:nvSpPr>
+        <p:spPr>
+          <a:xfrm>
+            <a:off x="457200" y="1520000"/>
+            <a:ext cx="11247120" cy="420000"/>
+          </a:xfrm>
+          <a:prstGeom prst="rect">
+            <a:avLst/>
+          </a:prstGeom>
+          <a:solidFill>
+            <a:srgbClr val="F2F2F2"/>
+          </a:solidFill>
+          <a:ln w="12700">
+            <a:solidFill>
+              <a:srgbClr val="888888"/>
+            </a:solidFill>
+          </a:ln>
+          <a:effectLst/>
+        </p:spPr>
+        <p:style>
+          <a:lnRef idx="1">
+            <a:schemeClr val="accent1"/>
+          </a:lnRef>
+          <a:fillRef idx="3">
+            <a:schemeClr val="accent1"/>
+          </a:fillRef>
+          <a:effectRef idx="2">
+            <a:schemeClr val="accent1"/>
+          </a:effectRef>
+          <a:fontRef idx="minor">
+            <a:schemeClr val="lt1"/>
+          </a:fontRef>
+        </p:style>
+        <p:txBody>
+          <a:bodyPr rtlCol="0" anchor="ctr" wrap="square" lIns="130000" rIns="130000" tIns="45000" bIns="45000"/>
+          <a:lstStyle/>
+          <a:p>
+            <a:pPr algn="ctr"/>
+            <a:r>
+              <a:rPr sz="1500" b="1">
+                <a:solidFill>
+                  <a:srgbClr val="404040"/>
+                </a:solidFill>
+                <a:latin typeface="Arial"/>
+                <a:ea typeface="Arial"/>
+                <a:cs typeface="Arial"/>
+              </a:rPr>
+              <a:t>判定：背景特性に有意差なし（全項目 p &gt; 0.05、探索的）</a:t>
+            </a:r>
+          </a:p>
+          <a:p>
+            <a:pPr>
+              <a:lnSpc>
+                <a:spcPct val="100000"/>
+              </a:lnSpc>
+            </a:pPr>
+            <a:r>
+              <a:rPr sz="1150" b="0">
+                <a:solidFill>
+                  <a:srgbClr val="404040"/>
+                </a:solidFill>
+                <a:latin typeface="Arial"/>
+                <a:ea typeface="Arial"/>
+                <a:cs typeface="Arial"/>
+              </a:rPr>
+              <a:t>MMSE合計点のみ p = 0.086 とやや低いが有意水準には達しない（訴えあり群のほうがベースラインが低い傾向。結果3の留保点と同一）。</a:t>
+            </a:r>
+          </a:p>
+        </p:txBody>
+      </p:sp>
+      <p:graphicFrame>
+        <p:nvGraphicFramePr>
+          <p:cNvPr id="6" name="Table 5"/>
+          <p:cNvGraphicFramePr>
+            <a:graphicFrameLocks noGrp="1"/>
+          </p:cNvGraphicFramePr>
+          <p:nvPr/>
+        </p:nvGraphicFramePr>
+        <p:xfrm>
+          <a:off x="457200" y="2020000"/>
+          <a:ext cx="11247120" cy="3740712"/>
+        </p:xfrm>
+        <a:graphic>
+          <a:graphicData uri="http://schemas.openxmlformats.org/drawingml/2006/table">
+            <a:tbl>
+              <a:tblPr>
+                <a:tableStyleId>{5C22544A-7EE6-4342-B048-85BDC9FD1C3A}</a:tableStyleId>
+              </a:tblPr>
+              <a:tblGrid>
+                <a:gridCol w="2788920"/>
+                <a:gridCol w="2331720"/>
+                <a:gridCol w="2331720"/>
+                <a:gridCol w="2331720"/>
+                <a:gridCol w="1463040"/>
+              </a:tblGrid>
+              <a:tr h="311726">
+                <a:tc>
+                  <a:txBody>
+                    <a:bodyPr wrap="square"/>
+                    <a:lstStyle/>
+                    <a:p>
+                      <a:pPr algn="ctr"/>
+                      <a:r>
+                        <a:rPr sz="1300" b="1">
+                          <a:solidFill>
+                            <a:srgbClr val="000000"/>
+                          </a:solidFill>
+                          <a:latin typeface="Arial"/>
+                          <a:ea typeface="Arial"/>
+                          <a:cs typeface="Arial"/>
+                        </a:rPr>
+                        <a:t>項目</a:t>
+                      </a:r>
+                    </a:p>
+                  </a:txBody>
+                  <a:tcPr marL="91440" marR="91440" marT="36576" marB="36576">
+                    <a:lnL cap="flat" cmpd="sng" algn="ctr" w="0">
+                      <a:noFill/>
+                    </a:lnL>
+                    <a:lnR cap="flat" cmpd="sng" algn="ctr" w="0">
+                      <a:noFill/>
+                    </a:lnR>
+                    <a:lnT cap="flat" cmpd="sng" algn="ctr" w="0">
+                      <a:noFill/>
+                    </a:lnT>
+                    <a:lnB cap="flat" cmpd="sng" algn="ctr" w="9525">
+                      <a:solidFill>
+                        <a:srgbClr val="999999"/>
+                      </a:solidFill>
+                      <a:prstDash val="solid"/>
+                    </a:lnB>
+                    <a:solidFill>
+                      <a:srgbClr val="FFFFFF"/>
+                    </a:solidFill>
+                  </a:tcPr>
+                </a:tc>
+                <a:tc>
+                  <a:txBody>
+                    <a:bodyPr wrap="square"/>
+                    <a:lstStyle/>
+                    <a:p>
+                      <a:pPr algn="ctr"/>
+                      <a:r>
+                        <a:rPr sz="1300" b="1">
+                          <a:solidFill>
+                            <a:srgbClr val="000000"/>
+                          </a:solidFill>
+                          <a:latin typeface="Arial"/>
+                          <a:ea typeface="Arial"/>
+                          <a:cs typeface="Arial"/>
+                        </a:rPr>
+                        <a:t>全体 (N=29)</a:t>
+                      </a:r>
+                    </a:p>
+                  </a:txBody>
+                  <a:tcPr marL="91440" marR="91440" marT="36576" marB="36576">
+                    <a:lnL cap="flat" cmpd="sng" algn="ctr" w="0">
+                      <a:noFill/>
+                    </a:lnL>
+                    <a:lnR cap="flat" cmpd="sng" algn="ctr" w="0">
+                      <a:noFill/>
+                    </a:lnR>
+                    <a:lnT cap="flat" cmpd="sng" algn="ctr" w="0">
+                      <a:noFill/>
+                    </a:lnT>
+                    <a:lnB cap="flat" cmpd="sng" algn="ctr" w="9525">
+                      <a:solidFill>
+                        <a:srgbClr val="999999"/>
+                      </a:solidFill>
+                      <a:prstDash val="solid"/>
+                    </a:lnB>
+                    <a:solidFill>
+                      <a:srgbClr val="FFFFFF"/>
+                    </a:solidFill>
+                  </a:tcPr>
+                </a:tc>
+                <a:tc>
+                  <a:txBody>
+                    <a:bodyPr wrap="square"/>
+                    <a:lstStyle/>
+                    <a:p>
+                      <a:pPr algn="ctr"/>
+                      <a:r>
+                        <a:rPr sz="1300" b="1">
+                          <a:solidFill>
+                            <a:srgbClr val="000000"/>
+                          </a:solidFill>
+                          <a:latin typeface="Arial"/>
+                          <a:ea typeface="Arial"/>
+                          <a:cs typeface="Arial"/>
+                        </a:rPr>
+                        <a:t>訴えあり (n=9)</a:t>
+                      </a:r>
+                    </a:p>
+                  </a:txBody>
+                  <a:tcPr marL="91440" marR="91440" marT="36576" marB="36576">
+                    <a:lnL cap="flat" cmpd="sng" algn="ctr" w="0">
+                      <a:noFill/>
+                    </a:lnL>
+                    <a:lnR cap="flat" cmpd="sng" algn="ctr" w="0">
+                      <a:noFill/>
+                    </a:lnR>
+                    <a:lnT cap="flat" cmpd="sng" algn="ctr" w="0">
+                      <a:noFill/>
+                    </a:lnT>
+                    <a:lnB cap="flat" cmpd="sng" algn="ctr" w="9525">
+                      <a:solidFill>
+                        <a:srgbClr val="999999"/>
+                      </a:solidFill>
+                      <a:prstDash val="solid"/>
+                    </a:lnB>
+                    <a:solidFill>
+                      <a:srgbClr val="FFFFFF"/>
+                    </a:solidFill>
+                  </a:tcPr>
+                </a:tc>
+                <a:tc>
+                  <a:txBody>
+                    <a:bodyPr wrap="square"/>
+                    <a:lstStyle/>
+                    <a:p>
+                      <a:pPr algn="ctr"/>
+                      <a:r>
+                        <a:rPr sz="1300" b="1">
+                          <a:solidFill>
+                            <a:srgbClr val="000000"/>
+                          </a:solidFill>
+                          <a:latin typeface="Arial"/>
+                          <a:ea typeface="Arial"/>
+                          <a:cs typeface="Arial"/>
+                        </a:rPr>
+                        <a:t>訴えなし (n=20)</a:t>
+                      </a:r>
+                    </a:p>
+                  </a:txBody>
+                  <a:tcPr marL="91440" marR="91440" marT="36576" marB="36576">
+                    <a:lnL cap="flat" cmpd="sng" algn="ctr" w="0">
+                      <a:noFill/>
+                    </a:lnL>
+                    <a:lnR cap="flat" cmpd="sng" algn="ctr" w="0">
+                      <a:noFill/>
+                    </a:lnR>
+                    <a:lnT cap="flat" cmpd="sng" algn="ctr" w="0">
+                      <a:noFill/>
+                    </a:lnT>
+                    <a:lnB cap="flat" cmpd="sng" algn="ctr" w="9525">
+                      <a:solidFill>
+                        <a:srgbClr val="999999"/>
+                      </a:solidFill>
+                      <a:prstDash val="solid"/>
+                    </a:lnB>
+                    <a:solidFill>
+                      <a:srgbClr val="FFFFFF"/>
+                    </a:solidFill>
+                  </a:tcPr>
+                </a:tc>
+                <a:tc>
+                  <a:txBody>
+                    <a:bodyPr wrap="square"/>
+                    <a:lstStyle/>
+                    <a:p>
+                      <a:pPr algn="ctr"/>
+                      <a:r>
+                        <a:rPr sz="1300" b="1">
+                          <a:solidFill>
+                            <a:srgbClr val="000000"/>
+                          </a:solidFill>
+                          <a:latin typeface="Arial"/>
+                          <a:ea typeface="Arial"/>
+                          <a:cs typeface="Arial"/>
+                        </a:rPr>
+                        <a:t>p値（参考）</a:t>
+                      </a:r>
+                    </a:p>
+                  </a:txBody>
+                  <a:tcPr marL="91440" marR="91440" marT="36576" marB="36576">
+                    <a:lnL cap="flat" cmpd="sng" algn="ctr" w="0">
+                      <a:noFill/>
+                    </a:lnL>
+                    <a:lnR cap="flat" cmpd="sng" algn="ctr" w="0">
+                      <a:noFill/>
+                    </a:lnR>
+                    <a:lnT cap="flat" cmpd="sng" algn="ctr" w="0">
+                      <a:noFill/>
+                    </a:lnT>
+                    <a:lnB cap="flat" cmpd="sng" algn="ctr" w="9525">
+                      <a:solidFill>
+                        <a:srgbClr val="999999"/>
+                      </a:solidFill>
+                      <a:prstDash val="solid"/>
+                    </a:lnB>
+                    <a:solidFill>
+                      <a:srgbClr val="FFFFFF"/>
+                    </a:solidFill>
+                  </a:tcPr>
+                </a:tc>
+              </a:tr>
+              <a:tr h="311726">
+                <a:tc>
+                  <a:txBody>
+                    <a:bodyPr wrap="square"/>
+                    <a:lstStyle/>
+                    <a:p>
+                      <a:pPr algn="l"/>
+                      <a:r>
+                        <a:rPr sz="1200" b="0">
+                          <a:solidFill>
+                            <a:srgbClr val="000000"/>
+                          </a:solidFill>
+                          <a:latin typeface="Arial"/>
+                          <a:ea typeface="Arial"/>
+                          <a:cs typeface="Arial"/>
+                        </a:rPr>
+                        <a:t>年齢（歳）</a:t>
+                      </a:r>
+                    </a:p>
+                  </a:txBody>
+                  <a:tcPr marL="91440" marR="91440" marT="36576" marB="36576">
+                    <a:lnL cap="flat" cmpd="sng" algn="ctr" w="0">
+                      <a:noFill/>
+                    </a:lnL>
+                    <a:lnR cap="flat" cmpd="sng" algn="ctr" w="0">
+                      <a:noFill/>
+                    </a:lnR>
+                    <a:lnT cap="flat" cmpd="sng" algn="ctr" w="0">
+                      <a:noFill/>
+                    </a:lnT>
+                    <a:lnB cap="flat" cmpd="sng" algn="ctr" w="9525">
+                      <a:solidFill>
+                        <a:srgbClr val="999999"/>
+                      </a:solidFill>
+                      <a:prstDash val="solid"/>
+                    </a:lnB>
+                    <a:solidFill>
+                      <a:srgbClr val="FFFFFF"/>
+                    </a:solidFill>
+                  </a:tcPr>
+                </a:tc>
+                <a:tc>
+                  <a:txBody>
+                    <a:bodyPr wrap="square"/>
+                    <a:lstStyle/>
+                    <a:p>
+                      <a:pPr algn="ctr"/>
+                      <a:r>
+                        <a:rPr sz="1200" b="0">
+                          <a:solidFill>
+                            <a:srgbClr val="000000"/>
+                          </a:solidFill>
+                          <a:latin typeface="Arial"/>
+                          <a:ea typeface="Arial"/>
+                          <a:cs typeface="Arial"/>
+                        </a:rPr>
+                        <a:t>75.4 ± 5.2</a:t>
+                      </a:r>
+                    </a:p>
+                  </a:txBody>
+                  <a:tcPr marL="91440" marR="91440" marT="36576" marB="36576">
+                    <a:lnL cap="flat" cmpd="sng" algn="ctr" w="0">
+                      <a:noFill/>
+                    </a:lnL>
+                    <a:lnR cap="flat" cmpd="sng" algn="ctr" w="0">
+                      <a:noFill/>
+                    </a:lnR>
+                    <a:lnT cap="flat" cmpd="sng" algn="ctr" w="0">
+                      <a:noFill/>
+                    </a:lnT>
+                    <a:lnB cap="flat" cmpd="sng" algn="ctr" w="9525">
+                      <a:solidFill>
+                        <a:srgbClr val="999999"/>
+                      </a:solidFill>
+                      <a:prstDash val="solid"/>
+                    </a:lnB>
+                    <a:solidFill>
+                      <a:srgbClr val="FFFFFF"/>
+                    </a:solidFill>
+                  </a:tcPr>
+                </a:tc>
+                <a:tc>
+                  <a:txBody>
+                    <a:bodyPr wrap="square"/>
+                    <a:lstStyle/>
+                    <a:p>
+                      <a:pPr algn="ctr"/>
+                      <a:r>
+                        <a:rPr sz="1200" b="0">
+                          <a:solidFill>
+                            <a:srgbClr val="000000"/>
+                          </a:solidFill>
+                          <a:latin typeface="Arial"/>
+                          <a:ea typeface="Arial"/>
+                          <a:cs typeface="Arial"/>
+                        </a:rPr>
+                        <a:t>75.2 ± 4.1</a:t>
+                      </a:r>
+                    </a:p>
+                  </a:txBody>
+                  <a:tcPr marL="91440" marR="91440" marT="36576" marB="36576">
+                    <a:lnL cap="flat" cmpd="sng" algn="ctr" w="0">
+                      <a:noFill/>
+                    </a:lnL>
+                    <a:lnR cap="flat" cmpd="sng" algn="ctr" w="0">
+                      <a:noFill/>
+                    </a:lnR>
+                    <a:lnT cap="flat" cmpd="sng" algn="ctr" w="0">
+                      <a:noFill/>
+                    </a:lnT>
+                    <a:lnB cap="flat" cmpd="sng" algn="ctr" w="9525">
+                      <a:solidFill>
+                        <a:srgbClr val="999999"/>
+                      </a:solidFill>
+                      <a:prstDash val="solid"/>
+                    </a:lnB>
+                    <a:solidFill>
+                      <a:srgbClr val="FFFFFF"/>
+                    </a:solidFill>
+                  </a:tcPr>
+                </a:tc>
+                <a:tc>
+                  <a:txBody>
+                    <a:bodyPr wrap="square"/>
+                    <a:lstStyle/>
+                    <a:p>
+                      <a:pPr algn="ctr"/>
+                      <a:r>
+                        <a:rPr sz="1200" b="0">
+                          <a:solidFill>
+                            <a:srgbClr val="000000"/>
+                          </a:solidFill>
+                          <a:latin typeface="Arial"/>
+                          <a:ea typeface="Arial"/>
+                          <a:cs typeface="Arial"/>
+                        </a:rPr>
+                        <a:t>75.5 ± 5.7</a:t>
+                      </a:r>
+                    </a:p>
+                  </a:txBody>
+                  <a:tcPr marL="91440" marR="91440" marT="36576" marB="36576">
+                    <a:lnL cap="flat" cmpd="sng" algn="ctr" w="0">
+                      <a:noFill/>
+                    </a:lnL>
+                    <a:lnR cap="flat" cmpd="sng" algn="ctr" w="0">
+                      <a:noFill/>
+                    </a:lnR>
+                    <a:lnT cap="flat" cmpd="sng" algn="ctr" w="0">
+                      <a:noFill/>
+                    </a:lnT>
+                    <a:lnB cap="flat" cmpd="sng" algn="ctr" w="9525">
+                      <a:solidFill>
+                        <a:srgbClr val="999999"/>
+                      </a:solidFill>
+                      <a:prstDash val="solid"/>
+                    </a:lnB>
+                    <a:solidFill>
+                      <a:srgbClr val="FFFFFF"/>
+                    </a:solidFill>
+                  </a:tcPr>
+                </a:tc>
+                <a:tc>
+                  <a:txBody>
+                    <a:bodyPr wrap="square"/>
+                    <a:lstStyle/>
+                    <a:p>
+                      <a:pPr algn="ctr"/>
+                      <a:r>
+                        <a:rPr sz="1200" b="0">
+                          <a:solidFill>
+                            <a:srgbClr val="000000"/>
+                          </a:solidFill>
+                          <a:latin typeface="Arial"/>
+                          <a:ea typeface="Arial"/>
+                          <a:cs typeface="Arial"/>
+                        </a:rPr>
+                        <a:t>p = 0.883</a:t>
+                      </a:r>
+                    </a:p>
+                  </a:txBody>
+                  <a:tcPr marL="91440" marR="91440" marT="36576" marB="36576">
+                    <a:lnL cap="flat" cmpd="sng" algn="ctr" w="0">
+                      <a:noFill/>
+                    </a:lnL>
+                    <a:lnR cap="flat" cmpd="sng" algn="ctr" w="0">
+                      <a:noFill/>
+                    </a:lnR>
+                    <a:lnT cap="flat" cmpd="sng" algn="ctr" w="0">
+                      <a:noFill/>
+                    </a:lnT>
+                    <a:lnB cap="flat" cmpd="sng" algn="ctr" w="9525">
+                      <a:solidFill>
+                        <a:srgbClr val="999999"/>
+                      </a:solidFill>
+                      <a:prstDash val="solid"/>
+                    </a:lnB>
+                    <a:solidFill>
+                      <a:srgbClr val="FFFFFF"/>
+                    </a:solidFill>
+                  </a:tcPr>
+                </a:tc>
+              </a:tr>
+              <a:tr h="311726">
+                <a:tc>
+                  <a:txBody>
+                    <a:bodyPr wrap="square"/>
+                    <a:lstStyle/>
+                    <a:p>
+                      <a:pPr algn="l"/>
+                      <a:r>
+                        <a:rPr sz="1200" b="0">
+                          <a:solidFill>
+                            <a:srgbClr val="000000"/>
+                          </a:solidFill>
+                          <a:latin typeface="Arial"/>
+                          <a:ea typeface="Arial"/>
+                          <a:cs typeface="Arial"/>
+                        </a:rPr>
+                        <a:t>女性</a:t>
+                      </a:r>
+                    </a:p>
+                  </a:txBody>
+                  <a:tcPr marL="91440" marR="91440" marT="36576" marB="36576">
+                    <a:lnL cap="flat" cmpd="sng" algn="ctr" w="0">
+                      <a:noFill/>
+                    </a:lnL>
+                    <a:lnR cap="flat" cmpd="sng" algn="ctr" w="0">
+                      <a:noFill/>
+                    </a:lnR>
+                    <a:lnT cap="flat" cmpd="sng" algn="ctr" w="0">
+                      <a:noFill/>
+                    </a:lnT>
+                    <a:lnB cap="flat" cmpd="sng" algn="ctr" w="9525">
+                      <a:solidFill>
+                        <a:srgbClr val="999999"/>
+                      </a:solidFill>
+                      <a:prstDash val="solid"/>
+                    </a:lnB>
+                    <a:solidFill>
+                      <a:srgbClr val="FFFFFF"/>
+                    </a:solidFill>
+                  </a:tcPr>
+                </a:tc>
+                <a:tc>
+                  <a:txBody>
+                    <a:bodyPr wrap="square"/>
+                    <a:lstStyle/>
+                    <a:p>
+                      <a:pPr algn="ctr"/>
+                      <a:r>
+                        <a:rPr sz="1200" b="0">
+                          <a:solidFill>
+                            <a:srgbClr val="000000"/>
+                          </a:solidFill>
+                          <a:latin typeface="Arial"/>
+                          <a:ea typeface="Arial"/>
+                          <a:cs typeface="Arial"/>
+                        </a:rPr>
+                        <a:t>21 (72.4%)</a:t>
+                      </a:r>
+                    </a:p>
+                  </a:txBody>
+                  <a:tcPr marL="91440" marR="91440" marT="36576" marB="36576">
+                    <a:lnL cap="flat" cmpd="sng" algn="ctr" w="0">
+                      <a:noFill/>
+                    </a:lnL>
+                    <a:lnR cap="flat" cmpd="sng" algn="ctr" w="0">
+                      <a:noFill/>
+                    </a:lnR>
+                    <a:lnT cap="flat" cmpd="sng" algn="ctr" w="0">
+                      <a:noFill/>
+                    </a:lnT>
+                    <a:lnB cap="flat" cmpd="sng" algn="ctr" w="9525">
+                      <a:solidFill>
+                        <a:srgbClr val="999999"/>
+                      </a:solidFill>
+                      <a:prstDash val="solid"/>
+                    </a:lnB>
+                    <a:solidFill>
+                      <a:srgbClr val="FFFFFF"/>
+                    </a:solidFill>
+                  </a:tcPr>
+                </a:tc>
+                <a:tc>
+                  <a:txBody>
+                    <a:bodyPr wrap="square"/>
+                    <a:lstStyle/>
+                    <a:p>
+                      <a:pPr algn="ctr"/>
+                      <a:r>
+                        <a:rPr sz="1200" b="0">
+                          <a:solidFill>
+                            <a:srgbClr val="000000"/>
+                          </a:solidFill>
+                          <a:latin typeface="Arial"/>
+                          <a:ea typeface="Arial"/>
+                          <a:cs typeface="Arial"/>
+                        </a:rPr>
+                        <a:t>5 (55.6%)</a:t>
+                      </a:r>
+                    </a:p>
+                  </a:txBody>
+                  <a:tcPr marL="91440" marR="91440" marT="36576" marB="36576">
+                    <a:lnL cap="flat" cmpd="sng" algn="ctr" w="0">
+                      <a:noFill/>
+                    </a:lnL>
+                    <a:lnR cap="flat" cmpd="sng" algn="ctr" w="0">
+                      <a:noFill/>
+                    </a:lnR>
+                    <a:lnT cap="flat" cmpd="sng" algn="ctr" w="0">
+                      <a:noFill/>
+                    </a:lnT>
+                    <a:lnB cap="flat" cmpd="sng" algn="ctr" w="9525">
+                      <a:solidFill>
+                        <a:srgbClr val="999999"/>
+                      </a:solidFill>
+                      <a:prstDash val="solid"/>
+                    </a:lnB>
+                    <a:solidFill>
+                      <a:srgbClr val="FFFFFF"/>
+                    </a:solidFill>
+                  </a:tcPr>
+                </a:tc>
+                <a:tc>
+                  <a:txBody>
+                    <a:bodyPr wrap="square"/>
+                    <a:lstStyle/>
+                    <a:p>
+                      <a:pPr algn="ctr"/>
+                      <a:r>
+                        <a:rPr sz="1200" b="0">
+                          <a:solidFill>
+                            <a:srgbClr val="000000"/>
+                          </a:solidFill>
+                          <a:latin typeface="Arial"/>
+                          <a:ea typeface="Arial"/>
+                          <a:cs typeface="Arial"/>
+                        </a:rPr>
+                        <a:t>16 (80.0%)</a:t>
+                      </a:r>
+                    </a:p>
+                  </a:txBody>
+                  <a:tcPr marL="91440" marR="91440" marT="36576" marB="36576">
+                    <a:lnL cap="flat" cmpd="sng" algn="ctr" w="0">
+                      <a:noFill/>
+                    </a:lnL>
+                    <a:lnR cap="flat" cmpd="sng" algn="ctr" w="0">
+                      <a:noFill/>
+                    </a:lnR>
+                    <a:lnT cap="flat" cmpd="sng" algn="ctr" w="0">
+                      <a:noFill/>
+                    </a:lnT>
+                    <a:lnB cap="flat" cmpd="sng" algn="ctr" w="9525">
+                      <a:solidFill>
+                        <a:srgbClr val="999999"/>
+                      </a:solidFill>
+                      <a:prstDash val="solid"/>
+                    </a:lnB>
+                    <a:solidFill>
+                      <a:srgbClr val="FFFFFF"/>
+                    </a:solidFill>
+                  </a:tcPr>
+                </a:tc>
+                <a:tc>
+                  <a:txBody>
+                    <a:bodyPr wrap="square"/>
+                    <a:lstStyle/>
+                    <a:p>
+                      <a:pPr algn="ctr"/>
+                      <a:r>
+                        <a:rPr sz="1200" b="0">
+                          <a:solidFill>
+                            <a:srgbClr val="000000"/>
+                          </a:solidFill>
+                          <a:latin typeface="Arial"/>
+                          <a:ea typeface="Arial"/>
+                          <a:cs typeface="Arial"/>
+                        </a:rPr>
+                        <a:t>p = 0.209</a:t>
+                      </a:r>
+                    </a:p>
+                  </a:txBody>
+                  <a:tcPr marL="91440" marR="91440" marT="36576" marB="36576">
+                    <a:lnL cap="flat" cmpd="sng" algn="ctr" w="0">
+                      <a:noFill/>
+                    </a:lnL>
+                    <a:lnR cap="flat" cmpd="sng" algn="ctr" w="0">
+                      <a:noFill/>
+                    </a:lnR>
+                    <a:lnT cap="flat" cmpd="sng" algn="ctr" w="0">
+                      <a:noFill/>
+                    </a:lnT>
+                    <a:lnB cap="flat" cmpd="sng" algn="ctr" w="9525">
+                      <a:solidFill>
+                        <a:srgbClr val="999999"/>
+                      </a:solidFill>
+                      <a:prstDash val="solid"/>
+                    </a:lnB>
+                    <a:solidFill>
+                      <a:srgbClr val="FFFFFF"/>
+                    </a:solidFill>
+                  </a:tcPr>
+                </a:tc>
+              </a:tr>
+              <a:tr h="311726">
+                <a:tc>
+                  <a:txBody>
+                    <a:bodyPr wrap="square"/>
+                    <a:lstStyle/>
+                    <a:p>
+                      <a:pPr algn="l"/>
+                      <a:r>
+                        <a:rPr sz="1200" b="0">
+                          <a:solidFill>
+                            <a:srgbClr val="000000"/>
+                          </a:solidFill>
+                          <a:latin typeface="Arial"/>
+                          <a:ea typeface="Arial"/>
+                          <a:cs typeface="Arial"/>
+                        </a:rPr>
+                        <a:t>男性</a:t>
+                      </a:r>
+                    </a:p>
+                  </a:txBody>
+                  <a:tcPr marL="91440" marR="91440" marT="36576" marB="36576">
+                    <a:lnL cap="flat" cmpd="sng" algn="ctr" w="0">
+                      <a:noFill/>
+                    </a:lnL>
+                    <a:lnR cap="flat" cmpd="sng" algn="ctr" w="0">
+                      <a:noFill/>
+                    </a:lnR>
+                    <a:lnT cap="flat" cmpd="sng" algn="ctr" w="0">
+                      <a:noFill/>
+                    </a:lnT>
+                    <a:lnB cap="flat" cmpd="sng" algn="ctr" w="9525">
+                      <a:solidFill>
+                        <a:srgbClr val="999999"/>
+                      </a:solidFill>
+                      <a:prstDash val="solid"/>
+                    </a:lnB>
+                    <a:solidFill>
+                      <a:srgbClr val="FFFFFF"/>
+                    </a:solidFill>
+                  </a:tcPr>
+                </a:tc>
+                <a:tc>
+                  <a:txBody>
+                    <a:bodyPr wrap="square"/>
+                    <a:lstStyle/>
+                    <a:p>
+                      <a:pPr algn="ctr"/>
+                      <a:r>
+                        <a:rPr sz="1200" b="0">
+                          <a:solidFill>
+                            <a:srgbClr val="000000"/>
+                          </a:solidFill>
+                          <a:latin typeface="Arial"/>
+                          <a:ea typeface="Arial"/>
+                          <a:cs typeface="Arial"/>
+                        </a:rPr>
+                        <a:t>8 (27.6%)</a:t>
+                      </a:r>
+                    </a:p>
+                  </a:txBody>
+                  <a:tcPr marL="91440" marR="91440" marT="36576" marB="36576">
+                    <a:lnL cap="flat" cmpd="sng" algn="ctr" w="0">
+                      <a:noFill/>
+                    </a:lnL>
+                    <a:lnR cap="flat" cmpd="sng" algn="ctr" w="0">
+                      <a:noFill/>
+                    </a:lnR>
+                    <a:lnT cap="flat" cmpd="sng" algn="ctr" w="0">
+                      <a:noFill/>
+                    </a:lnT>
+                    <a:lnB cap="flat" cmpd="sng" algn="ctr" w="9525">
+                      <a:solidFill>
+                        <a:srgbClr val="999999"/>
+                      </a:solidFill>
+                      <a:prstDash val="solid"/>
+                    </a:lnB>
+                    <a:solidFill>
+                      <a:srgbClr val="FFFFFF"/>
+                    </a:solidFill>
+                  </a:tcPr>
+                </a:tc>
+                <a:tc>
+                  <a:txBody>
+                    <a:bodyPr wrap="square"/>
+                    <a:lstStyle/>
+                    <a:p>
+                      <a:pPr algn="ctr"/>
+                      <a:r>
+                        <a:rPr sz="1200" b="0">
+                          <a:solidFill>
+                            <a:srgbClr val="000000"/>
+                          </a:solidFill>
+                          <a:latin typeface="Arial"/>
+                          <a:ea typeface="Arial"/>
+                          <a:cs typeface="Arial"/>
+                        </a:rPr>
+                        <a:t>4 (44.4%)</a:t>
+                      </a:r>
+                    </a:p>
+                  </a:txBody>
+                  <a:tcPr marL="91440" marR="91440" marT="36576" marB="36576">
+                    <a:lnL cap="flat" cmpd="sng" algn="ctr" w="0">
+                      <a:noFill/>
+                    </a:lnL>
+                    <a:lnR cap="flat" cmpd="sng" algn="ctr" w="0">
+                      <a:noFill/>
+                    </a:lnR>
+                    <a:lnT cap="flat" cmpd="sng" algn="ctr" w="0">
+                      <a:noFill/>
+                    </a:lnT>
+                    <a:lnB cap="flat" cmpd="sng" algn="ctr" w="9525">
+                      <a:solidFill>
+                        <a:srgbClr val="999999"/>
+                      </a:solidFill>
+                      <a:prstDash val="solid"/>
+                    </a:lnB>
+                    <a:solidFill>
+                      <a:srgbClr val="FFFFFF"/>
+                    </a:solidFill>
+                  </a:tcPr>
+                </a:tc>
+                <a:tc>
+                  <a:txBody>
+                    <a:bodyPr wrap="square"/>
+                    <a:lstStyle/>
+                    <a:p>
+                      <a:pPr algn="ctr"/>
+                      <a:r>
+                        <a:rPr sz="1200" b="0">
+                          <a:solidFill>
+                            <a:srgbClr val="000000"/>
+                          </a:solidFill>
+                          <a:latin typeface="Arial"/>
+                          <a:ea typeface="Arial"/>
+                          <a:cs typeface="Arial"/>
+                        </a:rPr>
+                        <a:t>4 (20.0%)</a:t>
+                      </a:r>
+                    </a:p>
+                  </a:txBody>
+                  <a:tcPr marL="91440" marR="91440" marT="36576" marB="36576">
+                    <a:lnL cap="flat" cmpd="sng" algn="ctr" w="0">
+                      <a:noFill/>
+                    </a:lnL>
+                    <a:lnR cap="flat" cmpd="sng" algn="ctr" w="0">
+                      <a:noFill/>
+                    </a:lnR>
+                    <a:lnT cap="flat" cmpd="sng" algn="ctr" w="0">
+                      <a:noFill/>
+                    </a:lnT>
+                    <a:lnB cap="flat" cmpd="sng" algn="ctr" w="9525">
+                      <a:solidFill>
+                        <a:srgbClr val="999999"/>
+                      </a:solidFill>
+                      <a:prstDash val="solid"/>
+                    </a:lnB>
+                    <a:solidFill>
+                      <a:srgbClr val="FFFFFF"/>
+                    </a:solidFill>
+                  </a:tcPr>
+                </a:tc>
+                <a:tc>
+                  <a:txBody>
+                    <a:bodyPr wrap="square"/>
+                    <a:lstStyle/>
+                    <a:p>
+                      <a:pPr algn="ctr"/>
+                      <a:r>
+                        <a:rPr sz="1200" b="0">
+                          <a:solidFill>
+                            <a:srgbClr val="000000"/>
+                          </a:solidFill>
+                          <a:latin typeface="Arial"/>
+                          <a:ea typeface="Arial"/>
+                          <a:cs typeface="Arial"/>
+                        </a:rPr>
+                        <a:t>－</a:t>
+                      </a:r>
+                    </a:p>
+                  </a:txBody>
+                  <a:tcPr marL="91440" marR="91440" marT="36576" marB="36576">
+                    <a:lnL cap="flat" cmpd="sng" algn="ctr" w="0">
+                      <a:noFill/>
+                    </a:lnL>
+                    <a:lnR cap="flat" cmpd="sng" algn="ctr" w="0">
+                      <a:noFill/>
+                    </a:lnR>
+                    <a:lnT cap="flat" cmpd="sng" algn="ctr" w="0">
+                      <a:noFill/>
+                    </a:lnT>
+                    <a:lnB cap="flat" cmpd="sng" algn="ctr" w="9525">
+                      <a:solidFill>
+                        <a:srgbClr val="999999"/>
+                      </a:solidFill>
+                      <a:prstDash val="solid"/>
+                    </a:lnB>
+                    <a:solidFill>
+                      <a:srgbClr val="FFFFFF"/>
+                    </a:solidFill>
+                  </a:tcPr>
+                </a:tc>
+              </a:tr>
+              <a:tr h="311726">
+                <a:tc>
+                  <a:txBody>
+                    <a:bodyPr wrap="square"/>
+                    <a:lstStyle/>
+                    <a:p>
+                      <a:pPr algn="l"/>
+                      <a:r>
+                        <a:rPr sz="1200" b="0">
+                          <a:solidFill>
+                            <a:srgbClr val="000000"/>
+                          </a:solidFill>
+                          <a:latin typeface="Arial"/>
+                          <a:ea typeface="Arial"/>
+                          <a:cs typeface="Arial"/>
+                        </a:rPr>
+                        <a:t>MMSE合計点（0か月）</a:t>
+                      </a:r>
+                    </a:p>
+                  </a:txBody>
+                  <a:tcPr marL="91440" marR="91440" marT="36576" marB="36576">
+                    <a:lnL cap="flat" cmpd="sng" algn="ctr" w="0">
+                      <a:noFill/>
+                    </a:lnL>
+                    <a:lnR cap="flat" cmpd="sng" algn="ctr" w="0">
+                      <a:noFill/>
+                    </a:lnR>
+                    <a:lnT cap="flat" cmpd="sng" algn="ctr" w="0">
+                      <a:noFill/>
+                    </a:lnT>
+                    <a:lnB cap="flat" cmpd="sng" algn="ctr" w="9525">
+                      <a:solidFill>
+                        <a:srgbClr val="999999"/>
+                      </a:solidFill>
+                      <a:prstDash val="solid"/>
+                    </a:lnB>
+                    <a:solidFill>
+                      <a:srgbClr val="FFFFFF"/>
+                    </a:solidFill>
+                  </a:tcPr>
+                </a:tc>
+                <a:tc>
+                  <a:txBody>
+                    <a:bodyPr wrap="square"/>
+                    <a:lstStyle/>
+                    <a:p>
+                      <a:pPr algn="ctr"/>
+                      <a:r>
+                        <a:rPr sz="1200" b="0">
+                          <a:solidFill>
+                            <a:srgbClr val="000000"/>
+                          </a:solidFill>
+                          <a:latin typeface="Arial"/>
+                          <a:ea typeface="Arial"/>
+                          <a:cs typeface="Arial"/>
+                        </a:rPr>
+                        <a:t>23.83 ± 2.05</a:t>
+                      </a:r>
+                    </a:p>
+                  </a:txBody>
+                  <a:tcPr marL="91440" marR="91440" marT="36576" marB="36576">
+                    <a:lnL cap="flat" cmpd="sng" algn="ctr" w="0">
+                      <a:noFill/>
+                    </a:lnL>
+                    <a:lnR cap="flat" cmpd="sng" algn="ctr" w="0">
+                      <a:noFill/>
+                    </a:lnR>
+                    <a:lnT cap="flat" cmpd="sng" algn="ctr" w="0">
+                      <a:noFill/>
+                    </a:lnT>
+                    <a:lnB cap="flat" cmpd="sng" algn="ctr" w="9525">
+                      <a:solidFill>
+                        <a:srgbClr val="999999"/>
+                      </a:solidFill>
+                      <a:prstDash val="solid"/>
+                    </a:lnB>
+                    <a:solidFill>
+                      <a:srgbClr val="FFFFFF"/>
+                    </a:solidFill>
+                  </a:tcPr>
+                </a:tc>
+                <a:tc>
+                  <a:txBody>
+                    <a:bodyPr wrap="square"/>
+                    <a:lstStyle/>
+                    <a:p>
+                      <a:pPr algn="ctr"/>
+                      <a:r>
+                        <a:rPr sz="1200" b="0">
+                          <a:solidFill>
+                            <a:srgbClr val="000000"/>
+                          </a:solidFill>
+                          <a:latin typeface="Arial"/>
+                          <a:ea typeface="Arial"/>
+                          <a:cs typeface="Arial"/>
+                        </a:rPr>
+                        <a:t>22.89 ± 1.76</a:t>
+                      </a:r>
+                    </a:p>
+                  </a:txBody>
+                  <a:tcPr marL="91440" marR="91440" marT="36576" marB="36576">
+                    <a:lnL cap="flat" cmpd="sng" algn="ctr" w="0">
+                      <a:noFill/>
+                    </a:lnL>
+                    <a:lnR cap="flat" cmpd="sng" algn="ctr" w="0">
+                      <a:noFill/>
+                    </a:lnR>
+                    <a:lnT cap="flat" cmpd="sng" algn="ctr" w="0">
+                      <a:noFill/>
+                    </a:lnT>
+                    <a:lnB cap="flat" cmpd="sng" algn="ctr" w="9525">
+                      <a:solidFill>
+                        <a:srgbClr val="999999"/>
+                      </a:solidFill>
+                      <a:prstDash val="solid"/>
+                    </a:lnB>
+                    <a:solidFill>
+                      <a:srgbClr val="FFFFFF"/>
+                    </a:solidFill>
+                  </a:tcPr>
+                </a:tc>
+                <a:tc>
+                  <a:txBody>
+                    <a:bodyPr wrap="square"/>
+                    <a:lstStyle/>
+                    <a:p>
+                      <a:pPr algn="ctr"/>
+                      <a:r>
+                        <a:rPr sz="1200" b="0">
+                          <a:solidFill>
+                            <a:srgbClr val="000000"/>
+                          </a:solidFill>
+                          <a:latin typeface="Arial"/>
+                          <a:ea typeface="Arial"/>
+                          <a:cs typeface="Arial"/>
+                        </a:rPr>
+                        <a:t>24.25 ± 2.07</a:t>
+                      </a:r>
+                    </a:p>
+                  </a:txBody>
+                  <a:tcPr marL="91440" marR="91440" marT="36576" marB="36576">
+                    <a:lnL cap="flat" cmpd="sng" algn="ctr" w="0">
+                      <a:noFill/>
+                    </a:lnL>
+                    <a:lnR cap="flat" cmpd="sng" algn="ctr" w="0">
+                      <a:noFill/>
+                    </a:lnR>
+                    <a:lnT cap="flat" cmpd="sng" algn="ctr" w="0">
+                      <a:noFill/>
+                    </a:lnT>
+                    <a:lnB cap="flat" cmpd="sng" algn="ctr" w="9525">
+                      <a:solidFill>
+                        <a:srgbClr val="999999"/>
+                      </a:solidFill>
+                      <a:prstDash val="solid"/>
+                    </a:lnB>
+                    <a:solidFill>
+                      <a:srgbClr val="FFFFFF"/>
+                    </a:solidFill>
+                  </a:tcPr>
+                </a:tc>
+                <a:tc>
+                  <a:txBody>
+                    <a:bodyPr wrap="square"/>
+                    <a:lstStyle/>
+                    <a:p>
+                      <a:pPr algn="ctr"/>
+                      <a:r>
+                        <a:rPr sz="1200" b="0">
+                          <a:solidFill>
+                            <a:srgbClr val="000000"/>
+                          </a:solidFill>
+                          <a:latin typeface="Arial"/>
+                          <a:ea typeface="Arial"/>
+                          <a:cs typeface="Arial"/>
+                        </a:rPr>
+                        <a:t>p = 0.086</a:t>
+                      </a:r>
+                    </a:p>
+                  </a:txBody>
+                  <a:tcPr marL="91440" marR="91440" marT="36576" marB="36576">
+                    <a:lnL cap="flat" cmpd="sng" algn="ctr" w="0">
+                      <a:noFill/>
+                    </a:lnL>
+                    <a:lnR cap="flat" cmpd="sng" algn="ctr" w="0">
+                      <a:noFill/>
+                    </a:lnR>
+                    <a:lnT cap="flat" cmpd="sng" algn="ctr" w="0">
+                      <a:noFill/>
+                    </a:lnT>
+                    <a:lnB cap="flat" cmpd="sng" algn="ctr" w="9525">
+                      <a:solidFill>
+                        <a:srgbClr val="999999"/>
+                      </a:solidFill>
+                      <a:prstDash val="solid"/>
+                    </a:lnB>
+                    <a:solidFill>
+                      <a:srgbClr val="FFFFFF"/>
+                    </a:solidFill>
+                  </a:tcPr>
+                </a:tc>
+              </a:tr>
+              <a:tr h="311726">
+                <a:tc>
+                  <a:txBody>
+                    <a:bodyPr wrap="square"/>
+                    <a:lstStyle/>
+                    <a:p>
+                      <a:pPr algn="l"/>
+                      <a:r>
+                        <a:rPr sz="1200" b="0">
+                          <a:solidFill>
+                            <a:srgbClr val="000000"/>
+                          </a:solidFill>
+                          <a:latin typeface="Arial"/>
+                          <a:ea typeface="Arial"/>
+                          <a:cs typeface="Arial"/>
+                        </a:rPr>
+                        <a:t>HDS-R合計点（初回）</a:t>
+                      </a:r>
+                    </a:p>
+                  </a:txBody>
+                  <a:tcPr marL="91440" marR="91440" marT="36576" marB="36576">
+                    <a:lnL cap="flat" cmpd="sng" algn="ctr" w="0">
+                      <a:noFill/>
+                    </a:lnL>
+                    <a:lnR cap="flat" cmpd="sng" algn="ctr" w="0">
+                      <a:noFill/>
+                    </a:lnR>
+                    <a:lnT cap="flat" cmpd="sng" algn="ctr" w="0">
+                      <a:noFill/>
+                    </a:lnT>
+                    <a:lnB cap="flat" cmpd="sng" algn="ctr" w="9525">
+                      <a:solidFill>
+                        <a:srgbClr val="999999"/>
+                      </a:solidFill>
+                      <a:prstDash val="solid"/>
+                    </a:lnB>
+                    <a:solidFill>
+                      <a:srgbClr val="FFFFFF"/>
+                    </a:solidFill>
+                  </a:tcPr>
+                </a:tc>
+                <a:tc>
+                  <a:txBody>
+                    <a:bodyPr wrap="square"/>
+                    <a:lstStyle/>
+                    <a:p>
+                      <a:pPr algn="ctr"/>
+                      <a:r>
+                        <a:rPr sz="1200" b="0">
+                          <a:solidFill>
+                            <a:srgbClr val="000000"/>
+                          </a:solidFill>
+                          <a:latin typeface="Arial"/>
+                          <a:ea typeface="Arial"/>
+                          <a:cs typeface="Arial"/>
+                        </a:rPr>
+                        <a:t>21.52 ± 3.46</a:t>
+                      </a:r>
+                    </a:p>
+                  </a:txBody>
+                  <a:tcPr marL="91440" marR="91440" marT="36576" marB="36576">
+                    <a:lnL cap="flat" cmpd="sng" algn="ctr" w="0">
+                      <a:noFill/>
+                    </a:lnL>
+                    <a:lnR cap="flat" cmpd="sng" algn="ctr" w="0">
+                      <a:noFill/>
+                    </a:lnR>
+                    <a:lnT cap="flat" cmpd="sng" algn="ctr" w="0">
+                      <a:noFill/>
+                    </a:lnT>
+                    <a:lnB cap="flat" cmpd="sng" algn="ctr" w="9525">
+                      <a:solidFill>
+                        <a:srgbClr val="999999"/>
+                      </a:solidFill>
+                      <a:prstDash val="solid"/>
+                    </a:lnB>
+                    <a:solidFill>
+                      <a:srgbClr val="FFFFFF"/>
+                    </a:solidFill>
+                  </a:tcPr>
+                </a:tc>
+                <a:tc>
+                  <a:txBody>
+                    <a:bodyPr wrap="square"/>
+                    <a:lstStyle/>
+                    <a:p>
+                      <a:pPr algn="ctr"/>
+                      <a:r>
+                        <a:rPr sz="1200" b="0">
+                          <a:solidFill>
+                            <a:srgbClr val="000000"/>
+                          </a:solidFill>
+                          <a:latin typeface="Arial"/>
+                          <a:ea typeface="Arial"/>
+                          <a:cs typeface="Arial"/>
+                        </a:rPr>
+                        <a:t>21.22 ± 3.93</a:t>
+                      </a:r>
+                    </a:p>
+                  </a:txBody>
+                  <a:tcPr marL="91440" marR="91440" marT="36576" marB="36576">
+                    <a:lnL cap="flat" cmpd="sng" algn="ctr" w="0">
+                      <a:noFill/>
+                    </a:lnL>
+                    <a:lnR cap="flat" cmpd="sng" algn="ctr" w="0">
+                      <a:noFill/>
+                    </a:lnR>
+                    <a:lnT cap="flat" cmpd="sng" algn="ctr" w="0">
+                      <a:noFill/>
+                    </a:lnT>
+                    <a:lnB cap="flat" cmpd="sng" algn="ctr" w="9525">
+                      <a:solidFill>
+                        <a:srgbClr val="999999"/>
+                      </a:solidFill>
+                      <a:prstDash val="solid"/>
+                    </a:lnB>
+                    <a:solidFill>
+                      <a:srgbClr val="FFFFFF"/>
+                    </a:solidFill>
+                  </a:tcPr>
+                </a:tc>
+                <a:tc>
+                  <a:txBody>
+                    <a:bodyPr wrap="square"/>
+                    <a:lstStyle/>
+                    <a:p>
+                      <a:pPr algn="ctr"/>
+                      <a:r>
+                        <a:rPr sz="1200" b="0">
+                          <a:solidFill>
+                            <a:srgbClr val="000000"/>
+                          </a:solidFill>
+                          <a:latin typeface="Arial"/>
+                          <a:ea typeface="Arial"/>
+                          <a:cs typeface="Arial"/>
+                        </a:rPr>
+                        <a:t>21.65 ± 3.33</a:t>
+                      </a:r>
+                    </a:p>
+                  </a:txBody>
+                  <a:tcPr marL="91440" marR="91440" marT="36576" marB="36576">
+                    <a:lnL cap="flat" cmpd="sng" algn="ctr" w="0">
+                      <a:noFill/>
+                    </a:lnL>
+                    <a:lnR cap="flat" cmpd="sng" algn="ctr" w="0">
+                      <a:noFill/>
+                    </a:lnR>
+                    <a:lnT cap="flat" cmpd="sng" algn="ctr" w="0">
+                      <a:noFill/>
+                    </a:lnT>
+                    <a:lnB cap="flat" cmpd="sng" algn="ctr" w="9525">
+                      <a:solidFill>
+                        <a:srgbClr val="999999"/>
+                      </a:solidFill>
+                      <a:prstDash val="solid"/>
+                    </a:lnB>
+                    <a:solidFill>
+                      <a:srgbClr val="FFFFFF"/>
+                    </a:solidFill>
+                  </a:tcPr>
+                </a:tc>
+                <a:tc>
+                  <a:txBody>
+                    <a:bodyPr wrap="square"/>
+                    <a:lstStyle/>
+                    <a:p>
+                      <a:pPr algn="ctr"/>
+                      <a:r>
+                        <a:rPr sz="1200" b="0">
+                          <a:solidFill>
+                            <a:srgbClr val="000000"/>
+                          </a:solidFill>
+                          <a:latin typeface="Arial"/>
+                          <a:ea typeface="Arial"/>
+                          <a:cs typeface="Arial"/>
+                        </a:rPr>
+                        <a:t>p = 0.781</a:t>
+                      </a:r>
+                    </a:p>
+                  </a:txBody>
+                  <a:tcPr marL="91440" marR="91440" marT="36576" marB="36576">
+                    <a:lnL cap="flat" cmpd="sng" algn="ctr" w="0">
+                      <a:noFill/>
+                    </a:lnL>
+                    <a:lnR cap="flat" cmpd="sng" algn="ctr" w="0">
+                      <a:noFill/>
+                    </a:lnR>
+                    <a:lnT cap="flat" cmpd="sng" algn="ctr" w="0">
+                      <a:noFill/>
+                    </a:lnT>
+                    <a:lnB cap="flat" cmpd="sng" algn="ctr" w="9525">
+                      <a:solidFill>
+                        <a:srgbClr val="999999"/>
+                      </a:solidFill>
+                      <a:prstDash val="solid"/>
+                    </a:lnB>
+                    <a:solidFill>
+                      <a:srgbClr val="FFFFFF"/>
+                    </a:solidFill>
+                  </a:tcPr>
+                </a:tc>
+              </a:tr>
+              <a:tr h="311726">
+                <a:tc>
+                  <a:txBody>
+                    <a:bodyPr wrap="square"/>
+                    <a:lstStyle/>
+                    <a:p>
+                      <a:pPr algn="l"/>
+                      <a:r>
+                        <a:rPr sz="1200" b="0">
+                          <a:solidFill>
+                            <a:srgbClr val="000000"/>
+                          </a:solidFill>
+                          <a:latin typeface="Arial"/>
+                          <a:ea typeface="Arial"/>
+                          <a:cs typeface="Arial"/>
+                        </a:rPr>
+                        <a:t>MoCA-J合計点（0か月）</a:t>
+                      </a:r>
+                    </a:p>
+                  </a:txBody>
+                  <a:tcPr marL="91440" marR="91440" marT="36576" marB="36576">
+                    <a:lnL cap="flat" cmpd="sng" algn="ctr" w="0">
+                      <a:noFill/>
+                    </a:lnL>
+                    <a:lnR cap="flat" cmpd="sng" algn="ctr" w="0">
+                      <a:noFill/>
+                    </a:lnR>
+                    <a:lnT cap="flat" cmpd="sng" algn="ctr" w="0">
+                      <a:noFill/>
+                    </a:lnT>
+                    <a:lnB cap="flat" cmpd="sng" algn="ctr" w="9525">
+                      <a:solidFill>
+                        <a:srgbClr val="999999"/>
+                      </a:solidFill>
+                      <a:prstDash val="solid"/>
+                    </a:lnB>
+                    <a:solidFill>
+                      <a:srgbClr val="FFFFFF"/>
+                    </a:solidFill>
+                  </a:tcPr>
+                </a:tc>
+                <a:tc>
+                  <a:txBody>
+                    <a:bodyPr wrap="square"/>
+                    <a:lstStyle/>
+                    <a:p>
+                      <a:pPr algn="ctr"/>
+                      <a:r>
+                        <a:rPr sz="1200" b="0">
+                          <a:solidFill>
+                            <a:srgbClr val="000000"/>
+                          </a:solidFill>
+                          <a:latin typeface="Arial"/>
+                          <a:ea typeface="Arial"/>
+                          <a:cs typeface="Arial"/>
+                        </a:rPr>
+                        <a:t>20.07 ± 3.47</a:t>
+                      </a:r>
+                    </a:p>
+                  </a:txBody>
+                  <a:tcPr marL="91440" marR="91440" marT="36576" marB="36576">
+                    <a:lnL cap="flat" cmpd="sng" algn="ctr" w="0">
+                      <a:noFill/>
+                    </a:lnL>
+                    <a:lnR cap="flat" cmpd="sng" algn="ctr" w="0">
+                      <a:noFill/>
+                    </a:lnR>
+                    <a:lnT cap="flat" cmpd="sng" algn="ctr" w="0">
+                      <a:noFill/>
+                    </a:lnT>
+                    <a:lnB cap="flat" cmpd="sng" algn="ctr" w="9525">
+                      <a:solidFill>
+                        <a:srgbClr val="999999"/>
+                      </a:solidFill>
+                      <a:prstDash val="solid"/>
+                    </a:lnB>
+                    <a:solidFill>
+                      <a:srgbClr val="FFFFFF"/>
+                    </a:solidFill>
+                  </a:tcPr>
+                </a:tc>
+                <a:tc>
+                  <a:txBody>
+                    <a:bodyPr wrap="square"/>
+                    <a:lstStyle/>
+                    <a:p>
+                      <a:pPr algn="ctr"/>
+                      <a:r>
+                        <a:rPr sz="1200" b="0">
+                          <a:solidFill>
+                            <a:srgbClr val="000000"/>
+                          </a:solidFill>
+                          <a:latin typeface="Arial"/>
+                          <a:ea typeface="Arial"/>
+                          <a:cs typeface="Arial"/>
+                        </a:rPr>
+                        <a:t>19.00 ± 4.47</a:t>
+                      </a:r>
+                    </a:p>
+                  </a:txBody>
+                  <a:tcPr marL="91440" marR="91440" marT="36576" marB="36576">
+                    <a:lnL cap="flat" cmpd="sng" algn="ctr" w="0">
+                      <a:noFill/>
+                    </a:lnL>
+                    <a:lnR cap="flat" cmpd="sng" algn="ctr" w="0">
+                      <a:noFill/>
+                    </a:lnR>
+                    <a:lnT cap="flat" cmpd="sng" algn="ctr" w="0">
+                      <a:noFill/>
+                    </a:lnT>
+                    <a:lnB cap="flat" cmpd="sng" algn="ctr" w="9525">
+                      <a:solidFill>
+                        <a:srgbClr val="999999"/>
+                      </a:solidFill>
+                      <a:prstDash val="solid"/>
+                    </a:lnB>
+                    <a:solidFill>
+                      <a:srgbClr val="FFFFFF"/>
+                    </a:solidFill>
+                  </a:tcPr>
+                </a:tc>
+                <a:tc>
+                  <a:txBody>
+                    <a:bodyPr wrap="square"/>
+                    <a:lstStyle/>
+                    <a:p>
+                      <a:pPr algn="ctr"/>
+                      <a:r>
+                        <a:rPr sz="1200" b="0">
+                          <a:solidFill>
+                            <a:srgbClr val="000000"/>
+                          </a:solidFill>
+                          <a:latin typeface="Arial"/>
+                          <a:ea typeface="Arial"/>
+                          <a:cs typeface="Arial"/>
+                        </a:rPr>
+                        <a:t>20.58 ± 2.89</a:t>
+                      </a:r>
+                    </a:p>
+                  </a:txBody>
+                  <a:tcPr marL="91440" marR="91440" marT="36576" marB="36576">
+                    <a:lnL cap="flat" cmpd="sng" algn="ctr" w="0">
+                      <a:noFill/>
+                    </a:lnL>
+                    <a:lnR cap="flat" cmpd="sng" algn="ctr" w="0">
+                      <a:noFill/>
+                    </a:lnR>
+                    <a:lnT cap="flat" cmpd="sng" algn="ctr" w="0">
+                      <a:noFill/>
+                    </a:lnT>
+                    <a:lnB cap="flat" cmpd="sng" algn="ctr" w="9525">
+                      <a:solidFill>
+                        <a:srgbClr val="999999"/>
+                      </a:solidFill>
+                      <a:prstDash val="solid"/>
+                    </a:lnB>
+                    <a:solidFill>
+                      <a:srgbClr val="FFFFFF"/>
+                    </a:solidFill>
+                  </a:tcPr>
+                </a:tc>
+                <a:tc>
+                  <a:txBody>
+                    <a:bodyPr wrap="square"/>
+                    <a:lstStyle/>
+                    <a:p>
+                      <a:pPr algn="ctr"/>
+                      <a:r>
+                        <a:rPr sz="1200" b="0">
+                          <a:solidFill>
+                            <a:srgbClr val="000000"/>
+                          </a:solidFill>
+                          <a:latin typeface="Arial"/>
+                          <a:ea typeface="Arial"/>
+                          <a:cs typeface="Arial"/>
+                        </a:rPr>
+                        <a:t>p = 0.354</a:t>
+                      </a:r>
+                    </a:p>
+                  </a:txBody>
+                  <a:tcPr marL="91440" marR="91440" marT="36576" marB="36576">
+                    <a:lnL cap="flat" cmpd="sng" algn="ctr" w="0">
+                      <a:noFill/>
+                    </a:lnL>
+                    <a:lnR cap="flat" cmpd="sng" algn="ctr" w="0">
+                      <a:noFill/>
+                    </a:lnR>
+                    <a:lnT cap="flat" cmpd="sng" algn="ctr" w="0">
+                      <a:noFill/>
+                    </a:lnT>
+                    <a:lnB cap="flat" cmpd="sng" algn="ctr" w="9525">
+                      <a:solidFill>
+                        <a:srgbClr val="999999"/>
+                      </a:solidFill>
+                      <a:prstDash val="solid"/>
+                    </a:lnB>
+                    <a:solidFill>
+                      <a:srgbClr val="FFFFFF"/>
+                    </a:solidFill>
+                  </a:tcPr>
+                </a:tc>
+              </a:tr>
+              <a:tr h="311726">
+                <a:tc>
+                  <a:txBody>
+                    <a:bodyPr wrap="square"/>
+                    <a:lstStyle/>
+                    <a:p>
+                      <a:pPr algn="l"/>
+                      <a:r>
+                        <a:rPr sz="1200" b="0">
+                          <a:solidFill>
+                            <a:srgbClr val="000000"/>
+                          </a:solidFill>
+                          <a:latin typeface="Arial"/>
+                          <a:ea typeface="Arial"/>
+                          <a:cs typeface="Arial"/>
+                        </a:rPr>
+                        <a:t>Global CDR = 0.5（0か月）</a:t>
+                      </a:r>
+                    </a:p>
+                  </a:txBody>
+                  <a:tcPr marL="91440" marR="91440" marT="36576" marB="36576">
+                    <a:lnL cap="flat" cmpd="sng" algn="ctr" w="0">
+                      <a:noFill/>
+                    </a:lnL>
+                    <a:lnR cap="flat" cmpd="sng" algn="ctr" w="0">
+                      <a:noFill/>
+                    </a:lnR>
+                    <a:lnT cap="flat" cmpd="sng" algn="ctr" w="0">
+                      <a:noFill/>
+                    </a:lnT>
+                    <a:lnB cap="flat" cmpd="sng" algn="ctr" w="9525">
+                      <a:solidFill>
+                        <a:srgbClr val="999999"/>
+                      </a:solidFill>
+                      <a:prstDash val="solid"/>
+                    </a:lnB>
+                    <a:solidFill>
+                      <a:srgbClr val="FFFFFF"/>
+                    </a:solidFill>
+                  </a:tcPr>
+                </a:tc>
+                <a:tc>
+                  <a:txBody>
+                    <a:bodyPr wrap="square"/>
+                    <a:lstStyle/>
+                    <a:p>
+                      <a:pPr algn="ctr"/>
+                      <a:r>
+                        <a:rPr sz="1200" b="0">
+                          <a:solidFill>
+                            <a:srgbClr val="000000"/>
+                          </a:solidFill>
+                          <a:latin typeface="Arial"/>
+                          <a:ea typeface="Arial"/>
+                          <a:cs typeface="Arial"/>
+                        </a:rPr>
+                        <a:t>26 (96.3%)</a:t>
+                      </a:r>
+                    </a:p>
+                  </a:txBody>
+                  <a:tcPr marL="91440" marR="91440" marT="36576" marB="36576">
+                    <a:lnL cap="flat" cmpd="sng" algn="ctr" w="0">
+                      <a:noFill/>
+                    </a:lnL>
+                    <a:lnR cap="flat" cmpd="sng" algn="ctr" w="0">
+                      <a:noFill/>
+                    </a:lnR>
+                    <a:lnT cap="flat" cmpd="sng" algn="ctr" w="0">
+                      <a:noFill/>
+                    </a:lnT>
+                    <a:lnB cap="flat" cmpd="sng" algn="ctr" w="9525">
+                      <a:solidFill>
+                        <a:srgbClr val="999999"/>
+                      </a:solidFill>
+                      <a:prstDash val="solid"/>
+                    </a:lnB>
+                    <a:solidFill>
+                      <a:srgbClr val="FFFFFF"/>
+                    </a:solidFill>
+                  </a:tcPr>
+                </a:tc>
+                <a:tc>
+                  <a:txBody>
+                    <a:bodyPr wrap="square"/>
+                    <a:lstStyle/>
+                    <a:p>
+                      <a:pPr algn="ctr"/>
+                      <a:r>
+                        <a:rPr sz="1200" b="0">
+                          <a:solidFill>
+                            <a:srgbClr val="000000"/>
+                          </a:solidFill>
+                          <a:latin typeface="Arial"/>
+                          <a:ea typeface="Arial"/>
+                          <a:cs typeface="Arial"/>
+                        </a:rPr>
+                        <a:t>8 (100%)</a:t>
+                      </a:r>
+                    </a:p>
+                  </a:txBody>
+                  <a:tcPr marL="91440" marR="91440" marT="36576" marB="36576">
+                    <a:lnL cap="flat" cmpd="sng" algn="ctr" w="0">
+                      <a:noFill/>
+                    </a:lnL>
+                    <a:lnR cap="flat" cmpd="sng" algn="ctr" w="0">
+                      <a:noFill/>
+                    </a:lnR>
+                    <a:lnT cap="flat" cmpd="sng" algn="ctr" w="0">
+                      <a:noFill/>
+                    </a:lnT>
+                    <a:lnB cap="flat" cmpd="sng" algn="ctr" w="9525">
+                      <a:solidFill>
+                        <a:srgbClr val="999999"/>
+                      </a:solidFill>
+                      <a:prstDash val="solid"/>
+                    </a:lnB>
+                    <a:solidFill>
+                      <a:srgbClr val="FFFFFF"/>
+                    </a:solidFill>
+                  </a:tcPr>
+                </a:tc>
+                <a:tc>
+                  <a:txBody>
+                    <a:bodyPr wrap="square"/>
+                    <a:lstStyle/>
+                    <a:p>
+                      <a:pPr algn="ctr"/>
+                      <a:r>
+                        <a:rPr sz="1200" b="0">
+                          <a:solidFill>
+                            <a:srgbClr val="000000"/>
+                          </a:solidFill>
+                          <a:latin typeface="Arial"/>
+                          <a:ea typeface="Arial"/>
+                          <a:cs typeface="Arial"/>
+                        </a:rPr>
+                        <a:t>18 (94.7%)</a:t>
+                      </a:r>
+                    </a:p>
+                  </a:txBody>
+                  <a:tcPr marL="91440" marR="91440" marT="36576" marB="36576">
+                    <a:lnL cap="flat" cmpd="sng" algn="ctr" w="0">
+                      <a:noFill/>
+                    </a:lnL>
+                    <a:lnR cap="flat" cmpd="sng" algn="ctr" w="0">
+                      <a:noFill/>
+                    </a:lnR>
+                    <a:lnT cap="flat" cmpd="sng" algn="ctr" w="0">
+                      <a:noFill/>
+                    </a:lnT>
+                    <a:lnB cap="flat" cmpd="sng" algn="ctr" w="9525">
+                      <a:solidFill>
+                        <a:srgbClr val="999999"/>
+                      </a:solidFill>
+                      <a:prstDash val="solid"/>
+                    </a:lnB>
+                    <a:solidFill>
+                      <a:srgbClr val="FFFFFF"/>
+                    </a:solidFill>
+                  </a:tcPr>
+                </a:tc>
+                <a:tc>
+                  <a:txBody>
+                    <a:bodyPr wrap="square"/>
+                    <a:lstStyle/>
+                    <a:p>
+                      <a:pPr algn="ctr"/>
+                      <a:r>
+                        <a:rPr sz="1200" b="0">
+                          <a:solidFill>
+                            <a:srgbClr val="000000"/>
+                          </a:solidFill>
+                          <a:latin typeface="Arial"/>
+                          <a:ea typeface="Arial"/>
+                          <a:cs typeface="Arial"/>
+                        </a:rPr>
+                        <a:t>－</a:t>
+                      </a:r>
+                    </a:p>
+                  </a:txBody>
+                  <a:tcPr marL="91440" marR="91440" marT="36576" marB="36576">
+                    <a:lnL cap="flat" cmpd="sng" algn="ctr" w="0">
+                      <a:noFill/>
+                    </a:lnL>
+                    <a:lnR cap="flat" cmpd="sng" algn="ctr" w="0">
+                      <a:noFill/>
+                    </a:lnR>
+                    <a:lnT cap="flat" cmpd="sng" algn="ctr" w="0">
+                      <a:noFill/>
+                    </a:lnT>
+                    <a:lnB cap="flat" cmpd="sng" algn="ctr" w="9525">
+                      <a:solidFill>
+                        <a:srgbClr val="999999"/>
+                      </a:solidFill>
+                      <a:prstDash val="solid"/>
+                    </a:lnB>
+                    <a:solidFill>
+                      <a:srgbClr val="FFFFFF"/>
+                    </a:solidFill>
+                  </a:tcPr>
+                </a:tc>
+              </a:tr>
+              <a:tr h="311726">
+                <a:tc>
+                  <a:txBody>
+                    <a:bodyPr wrap="square"/>
+                    <a:lstStyle/>
+                    <a:p>
+                      <a:pPr algn="l"/>
+                      <a:r>
+                        <a:rPr sz="1200" b="0">
+                          <a:solidFill>
+                            <a:srgbClr val="000000"/>
+                          </a:solidFill>
+                          <a:latin typeface="Arial"/>
+                          <a:ea typeface="Arial"/>
+                          <a:cs typeface="Arial"/>
+                        </a:rPr>
+                        <a:t>Global CDR = 1.0（0か月）</a:t>
+                      </a:r>
+                    </a:p>
+                  </a:txBody>
+                  <a:tcPr marL="91440" marR="91440" marT="36576" marB="36576">
+                    <a:lnL cap="flat" cmpd="sng" algn="ctr" w="0">
+                      <a:noFill/>
+                    </a:lnL>
+                    <a:lnR cap="flat" cmpd="sng" algn="ctr" w="0">
+                      <a:noFill/>
+                    </a:lnR>
+                    <a:lnT cap="flat" cmpd="sng" algn="ctr" w="0">
+                      <a:noFill/>
+                    </a:lnT>
+                    <a:lnB cap="flat" cmpd="sng" algn="ctr" w="9525">
+                      <a:solidFill>
+                        <a:srgbClr val="999999"/>
+                      </a:solidFill>
+                      <a:prstDash val="solid"/>
+                    </a:lnB>
+                    <a:solidFill>
+                      <a:srgbClr val="FFFFFF"/>
+                    </a:solidFill>
+                  </a:tcPr>
+                </a:tc>
+                <a:tc>
+                  <a:txBody>
+                    <a:bodyPr wrap="square"/>
+                    <a:lstStyle/>
+                    <a:p>
+                      <a:pPr algn="ctr"/>
+                      <a:r>
+                        <a:rPr sz="1200" b="0">
+                          <a:solidFill>
+                            <a:srgbClr val="000000"/>
+                          </a:solidFill>
+                          <a:latin typeface="Arial"/>
+                          <a:ea typeface="Arial"/>
+                          <a:cs typeface="Arial"/>
+                        </a:rPr>
+                        <a:t>1 (3.7%)</a:t>
+                      </a:r>
+                    </a:p>
+                  </a:txBody>
+                  <a:tcPr marL="91440" marR="91440" marT="36576" marB="36576">
+                    <a:lnL cap="flat" cmpd="sng" algn="ctr" w="0">
+                      <a:noFill/>
+                    </a:lnL>
+                    <a:lnR cap="flat" cmpd="sng" algn="ctr" w="0">
+                      <a:noFill/>
+                    </a:lnR>
+                    <a:lnT cap="flat" cmpd="sng" algn="ctr" w="0">
+                      <a:noFill/>
+                    </a:lnT>
+                    <a:lnB cap="flat" cmpd="sng" algn="ctr" w="9525">
+                      <a:solidFill>
+                        <a:srgbClr val="999999"/>
+                      </a:solidFill>
+                      <a:prstDash val="solid"/>
+                    </a:lnB>
+                    <a:solidFill>
+                      <a:srgbClr val="FFFFFF"/>
+                    </a:solidFill>
+                  </a:tcPr>
+                </a:tc>
+                <a:tc>
+                  <a:txBody>
+                    <a:bodyPr wrap="square"/>
+                    <a:lstStyle/>
+                    <a:p>
+                      <a:pPr algn="ctr"/>
+                      <a:r>
+                        <a:rPr sz="1200" b="0">
+                          <a:solidFill>
+                            <a:srgbClr val="000000"/>
+                          </a:solidFill>
+                          <a:latin typeface="Arial"/>
+                          <a:ea typeface="Arial"/>
+                          <a:cs typeface="Arial"/>
+                        </a:rPr>
+                        <a:t>0 (0%)</a:t>
+                      </a:r>
+                    </a:p>
+                  </a:txBody>
+                  <a:tcPr marL="91440" marR="91440" marT="36576" marB="36576">
+                    <a:lnL cap="flat" cmpd="sng" algn="ctr" w="0">
+                      <a:noFill/>
+                    </a:lnL>
+                    <a:lnR cap="flat" cmpd="sng" algn="ctr" w="0">
+                      <a:noFill/>
+                    </a:lnR>
+                    <a:lnT cap="flat" cmpd="sng" algn="ctr" w="0">
+                      <a:noFill/>
+                    </a:lnT>
+                    <a:lnB cap="flat" cmpd="sng" algn="ctr" w="9525">
+                      <a:solidFill>
+                        <a:srgbClr val="999999"/>
+                      </a:solidFill>
+                      <a:prstDash val="solid"/>
+                    </a:lnB>
+                    <a:solidFill>
+                      <a:srgbClr val="FFFFFF"/>
+                    </a:solidFill>
+                  </a:tcPr>
+                </a:tc>
+                <a:tc>
+                  <a:txBody>
+                    <a:bodyPr wrap="square"/>
+                    <a:lstStyle/>
+                    <a:p>
+                      <a:pPr algn="ctr"/>
+                      <a:r>
+                        <a:rPr sz="1200" b="0">
+                          <a:solidFill>
+                            <a:srgbClr val="000000"/>
+                          </a:solidFill>
+                          <a:latin typeface="Arial"/>
+                          <a:ea typeface="Arial"/>
+                          <a:cs typeface="Arial"/>
+                        </a:rPr>
+                        <a:t>1 (5.3%)</a:t>
+                      </a:r>
+                    </a:p>
+                  </a:txBody>
+                  <a:tcPr marL="91440" marR="91440" marT="36576" marB="36576">
+                    <a:lnL cap="flat" cmpd="sng" algn="ctr" w="0">
+                      <a:noFill/>
+                    </a:lnL>
+                    <a:lnR cap="flat" cmpd="sng" algn="ctr" w="0">
+                      <a:noFill/>
+                    </a:lnR>
+                    <a:lnT cap="flat" cmpd="sng" algn="ctr" w="0">
+                      <a:noFill/>
+                    </a:lnT>
+                    <a:lnB cap="flat" cmpd="sng" algn="ctr" w="9525">
+                      <a:solidFill>
+                        <a:srgbClr val="999999"/>
+                      </a:solidFill>
+                      <a:prstDash val="solid"/>
+                    </a:lnB>
+                    <a:solidFill>
+                      <a:srgbClr val="FFFFFF"/>
+                    </a:solidFill>
+                  </a:tcPr>
+                </a:tc>
+                <a:tc>
+                  <a:txBody>
+                    <a:bodyPr wrap="square"/>
+                    <a:lstStyle/>
+                    <a:p>
+                      <a:pPr algn="ctr"/>
+                      <a:r>
+                        <a:rPr sz="1200" b="0">
+                          <a:solidFill>
+                            <a:srgbClr val="000000"/>
+                          </a:solidFill>
+                          <a:latin typeface="Arial"/>
+                          <a:ea typeface="Arial"/>
+                          <a:cs typeface="Arial"/>
+                        </a:rPr>
+                        <a:t>－</a:t>
+                      </a:r>
+                    </a:p>
+                  </a:txBody>
+                  <a:tcPr marL="91440" marR="91440" marT="36576" marB="36576">
+                    <a:lnL cap="flat" cmpd="sng" algn="ctr" w="0">
+                      <a:noFill/>
+                    </a:lnL>
+                    <a:lnR cap="flat" cmpd="sng" algn="ctr" w="0">
+                      <a:noFill/>
+                    </a:lnR>
+                    <a:lnT cap="flat" cmpd="sng" algn="ctr" w="0">
+                      <a:noFill/>
+                    </a:lnT>
+                    <a:lnB cap="flat" cmpd="sng" algn="ctr" w="9525">
+                      <a:solidFill>
+                        <a:srgbClr val="999999"/>
+                      </a:solidFill>
+                      <a:prstDash val="solid"/>
+                    </a:lnB>
+                    <a:solidFill>
+                      <a:srgbClr val="FFFFFF"/>
+                    </a:solidFill>
+                  </a:tcPr>
+                </a:tc>
+              </a:tr>
+              <a:tr h="311726">
+                <a:tc>
+                  <a:txBody>
+                    <a:bodyPr wrap="square"/>
+                    <a:lstStyle/>
+                    <a:p>
+                      <a:pPr algn="l"/>
+                      <a:r>
+                        <a:rPr sz="1200" b="0">
+                          <a:solidFill>
+                            <a:srgbClr val="000000"/>
+                          </a:solidFill>
+                          <a:latin typeface="Arial"/>
+                          <a:ea typeface="Arial"/>
+                          <a:cs typeface="Arial"/>
+                        </a:rPr>
+                        <a:t>CDR-SB（0か月）</a:t>
+                      </a:r>
+                    </a:p>
+                  </a:txBody>
+                  <a:tcPr marL="91440" marR="91440" marT="36576" marB="36576">
+                    <a:lnL cap="flat" cmpd="sng" algn="ctr" w="0">
+                      <a:noFill/>
+                    </a:lnL>
+                    <a:lnR cap="flat" cmpd="sng" algn="ctr" w="0">
+                      <a:noFill/>
+                    </a:lnR>
+                    <a:lnT cap="flat" cmpd="sng" algn="ctr" w="0">
+                      <a:noFill/>
+                    </a:lnT>
+                    <a:lnB cap="flat" cmpd="sng" algn="ctr" w="9525">
+                      <a:solidFill>
+                        <a:srgbClr val="999999"/>
+                      </a:solidFill>
+                      <a:prstDash val="solid"/>
+                    </a:lnB>
+                    <a:solidFill>
+                      <a:srgbClr val="FFFFFF"/>
+                    </a:solidFill>
+                  </a:tcPr>
+                </a:tc>
+                <a:tc>
+                  <a:txBody>
+                    <a:bodyPr wrap="square"/>
+                    <a:lstStyle/>
+                    <a:p>
+                      <a:pPr algn="ctr"/>
+                      <a:r>
+                        <a:rPr sz="1200" b="0">
+                          <a:solidFill>
+                            <a:srgbClr val="000000"/>
+                          </a:solidFill>
+                          <a:latin typeface="Arial"/>
+                          <a:ea typeface="Arial"/>
+                          <a:cs typeface="Arial"/>
+                        </a:rPr>
+                        <a:t>2.11 ± 1.02</a:t>
+                      </a:r>
+                    </a:p>
+                  </a:txBody>
+                  <a:tcPr marL="91440" marR="91440" marT="36576" marB="36576">
+                    <a:lnL cap="flat" cmpd="sng" algn="ctr" w="0">
+                      <a:noFill/>
+                    </a:lnL>
+                    <a:lnR cap="flat" cmpd="sng" algn="ctr" w="0">
+                      <a:noFill/>
+                    </a:lnR>
+                    <a:lnT cap="flat" cmpd="sng" algn="ctr" w="0">
+                      <a:noFill/>
+                    </a:lnT>
+                    <a:lnB cap="flat" cmpd="sng" algn="ctr" w="9525">
+                      <a:solidFill>
+                        <a:srgbClr val="999999"/>
+                      </a:solidFill>
+                      <a:prstDash val="solid"/>
+                    </a:lnB>
+                    <a:solidFill>
+                      <a:srgbClr val="FFFFFF"/>
+                    </a:solidFill>
+                  </a:tcPr>
+                </a:tc>
+                <a:tc>
+                  <a:txBody>
+                    <a:bodyPr wrap="square"/>
+                    <a:lstStyle/>
+                    <a:p>
+                      <a:pPr algn="ctr"/>
+                      <a:r>
+                        <a:rPr sz="1200" b="0">
+                          <a:solidFill>
+                            <a:srgbClr val="000000"/>
+                          </a:solidFill>
+                          <a:latin typeface="Arial"/>
+                          <a:ea typeface="Arial"/>
+                          <a:cs typeface="Arial"/>
+                        </a:rPr>
+                        <a:t>2.31 ± 1.07</a:t>
+                      </a:r>
+                    </a:p>
+                  </a:txBody>
+                  <a:tcPr marL="91440" marR="91440" marT="36576" marB="36576">
+                    <a:lnL cap="flat" cmpd="sng" algn="ctr" w="0">
+                      <a:noFill/>
+                    </a:lnL>
+                    <a:lnR cap="flat" cmpd="sng" algn="ctr" w="0">
+                      <a:noFill/>
+                    </a:lnR>
+                    <a:lnT cap="flat" cmpd="sng" algn="ctr" w="0">
+                      <a:noFill/>
+                    </a:lnT>
+                    <a:lnB cap="flat" cmpd="sng" algn="ctr" w="9525">
+                      <a:solidFill>
+                        <a:srgbClr val="999999"/>
+                      </a:solidFill>
+                      <a:prstDash val="solid"/>
+                    </a:lnB>
+                    <a:solidFill>
+                      <a:srgbClr val="FFFFFF"/>
+                    </a:solidFill>
+                  </a:tcPr>
+                </a:tc>
+                <a:tc>
+                  <a:txBody>
+                    <a:bodyPr wrap="square"/>
+                    <a:lstStyle/>
+                    <a:p>
+                      <a:pPr algn="ctr"/>
+                      <a:r>
+                        <a:rPr sz="1200" b="0">
+                          <a:solidFill>
+                            <a:srgbClr val="000000"/>
+                          </a:solidFill>
+                          <a:latin typeface="Arial"/>
+                          <a:ea typeface="Arial"/>
+                          <a:cs typeface="Arial"/>
+                        </a:rPr>
+                        <a:t>2.03 ± 1.02</a:t>
+                      </a:r>
+                    </a:p>
+                  </a:txBody>
+                  <a:tcPr marL="91440" marR="91440" marT="36576" marB="36576">
+                    <a:lnL cap="flat" cmpd="sng" algn="ctr" w="0">
+                      <a:noFill/>
+                    </a:lnL>
+                    <a:lnR cap="flat" cmpd="sng" algn="ctr" w="0">
+                      <a:noFill/>
+                    </a:lnR>
+                    <a:lnT cap="flat" cmpd="sng" algn="ctr" w="0">
+                      <a:noFill/>
+                    </a:lnT>
+                    <a:lnB cap="flat" cmpd="sng" algn="ctr" w="9525">
+                      <a:solidFill>
+                        <a:srgbClr val="999999"/>
+                      </a:solidFill>
+                      <a:prstDash val="solid"/>
+                    </a:lnB>
+                    <a:solidFill>
+                      <a:srgbClr val="FFFFFF"/>
+                    </a:solidFill>
+                  </a:tcPr>
+                </a:tc>
+                <a:tc>
+                  <a:txBody>
+                    <a:bodyPr wrap="square"/>
+                    <a:lstStyle/>
+                    <a:p>
+                      <a:pPr algn="ctr"/>
+                      <a:r>
+                        <a:rPr sz="1200" b="0">
+                          <a:solidFill>
+                            <a:srgbClr val="000000"/>
+                          </a:solidFill>
+                          <a:latin typeface="Arial"/>
+                          <a:ea typeface="Arial"/>
+                          <a:cs typeface="Arial"/>
+                        </a:rPr>
+                        <a:t>p = 0.531</a:t>
+                      </a:r>
+                    </a:p>
+                  </a:txBody>
+                  <a:tcPr marL="91440" marR="91440" marT="36576" marB="36576">
+                    <a:lnL cap="flat" cmpd="sng" algn="ctr" w="0">
+                      <a:noFill/>
+                    </a:lnL>
+                    <a:lnR cap="flat" cmpd="sng" algn="ctr" w="0">
+                      <a:noFill/>
+                    </a:lnR>
+                    <a:lnT cap="flat" cmpd="sng" algn="ctr" w="0">
+                      <a:noFill/>
+                    </a:lnT>
+                    <a:lnB cap="flat" cmpd="sng" algn="ctr" w="9525">
+                      <a:solidFill>
+                        <a:srgbClr val="999999"/>
+                      </a:solidFill>
+                      <a:prstDash val="solid"/>
+                    </a:lnB>
+                    <a:solidFill>
+                      <a:srgbClr val="FFFFFF"/>
+                    </a:solidFill>
+                  </a:tcPr>
+                </a:tc>
+              </a:tr>
+              <a:tr h="311726">
+                <a:tc>
+                  <a:txBody>
+                    <a:bodyPr wrap="square"/>
+                    <a:lstStyle/>
+                    <a:p>
+                      <a:pPr algn="l"/>
+                      <a:r>
+                        <a:rPr sz="1200" b="0">
+                          <a:solidFill>
+                            <a:srgbClr val="000000"/>
+                          </a:solidFill>
+                          <a:latin typeface="Arial"/>
+                          <a:ea typeface="Arial"/>
+                          <a:cs typeface="Arial"/>
+                        </a:rPr>
+                        <a:t>易怒性</a:t>
+                      </a:r>
+                    </a:p>
+                  </a:txBody>
+                  <a:tcPr marL="91440" marR="91440" marT="36576" marB="36576">
+                    <a:lnL cap="flat" cmpd="sng" algn="ctr" w="0">
+                      <a:noFill/>
+                    </a:lnL>
+                    <a:lnR cap="flat" cmpd="sng" algn="ctr" w="0">
+                      <a:noFill/>
+                    </a:lnR>
+                    <a:lnT cap="flat" cmpd="sng" algn="ctr" w="0">
+                      <a:noFill/>
+                    </a:lnT>
+                    <a:lnB cap="flat" cmpd="sng" algn="ctr" w="9525">
+                      <a:solidFill>
+                        <a:srgbClr val="999999"/>
+                      </a:solidFill>
+                      <a:prstDash val="solid"/>
+                    </a:lnB>
+                    <a:solidFill>
+                      <a:srgbClr val="FFFFFF"/>
+                    </a:solidFill>
+                  </a:tcPr>
+                </a:tc>
+                <a:tc>
+                  <a:txBody>
+                    <a:bodyPr wrap="square"/>
+                    <a:lstStyle/>
+                    <a:p>
+                      <a:pPr algn="ctr"/>
+                      <a:r>
+                        <a:rPr sz="1200" b="0">
+                          <a:solidFill>
+                            <a:srgbClr val="000000"/>
+                          </a:solidFill>
+                          <a:latin typeface="Arial"/>
+                          <a:ea typeface="Arial"/>
+                          <a:cs typeface="Arial"/>
+                        </a:rPr>
+                        <a:t>4 (13.8%)</a:t>
+                      </a:r>
+                    </a:p>
+                  </a:txBody>
+                  <a:tcPr marL="91440" marR="91440" marT="36576" marB="36576">
+                    <a:lnL cap="flat" cmpd="sng" algn="ctr" w="0">
+                      <a:noFill/>
+                    </a:lnL>
+                    <a:lnR cap="flat" cmpd="sng" algn="ctr" w="0">
+                      <a:noFill/>
+                    </a:lnR>
+                    <a:lnT cap="flat" cmpd="sng" algn="ctr" w="0">
+                      <a:noFill/>
+                    </a:lnT>
+                    <a:lnB cap="flat" cmpd="sng" algn="ctr" w="9525">
+                      <a:solidFill>
+                        <a:srgbClr val="999999"/>
+                      </a:solidFill>
+                      <a:prstDash val="solid"/>
+                    </a:lnB>
+                    <a:solidFill>
+                      <a:srgbClr val="FFFFFF"/>
+                    </a:solidFill>
+                  </a:tcPr>
+                </a:tc>
+                <a:tc>
+                  <a:txBody>
+                    <a:bodyPr wrap="square"/>
+                    <a:lstStyle/>
+                    <a:p>
+                      <a:pPr algn="ctr"/>
+                      <a:r>
+                        <a:rPr sz="1200" b="0">
+                          <a:solidFill>
+                            <a:srgbClr val="000000"/>
+                          </a:solidFill>
+                          <a:latin typeface="Arial"/>
+                          <a:ea typeface="Arial"/>
+                          <a:cs typeface="Arial"/>
+                        </a:rPr>
+                        <a:t>2 (22.2%)</a:t>
+                      </a:r>
+                    </a:p>
+                  </a:txBody>
+                  <a:tcPr marL="91440" marR="91440" marT="36576" marB="36576">
+                    <a:lnL cap="flat" cmpd="sng" algn="ctr" w="0">
+                      <a:noFill/>
+                    </a:lnL>
+                    <a:lnR cap="flat" cmpd="sng" algn="ctr" w="0">
+                      <a:noFill/>
+                    </a:lnR>
+                    <a:lnT cap="flat" cmpd="sng" algn="ctr" w="0">
+                      <a:noFill/>
+                    </a:lnT>
+                    <a:lnB cap="flat" cmpd="sng" algn="ctr" w="9525">
+                      <a:solidFill>
+                        <a:srgbClr val="999999"/>
+                      </a:solidFill>
+                      <a:prstDash val="solid"/>
+                    </a:lnB>
+                    <a:solidFill>
+                      <a:srgbClr val="FFFFFF"/>
+                    </a:solidFill>
+                  </a:tcPr>
+                </a:tc>
+                <a:tc>
+                  <a:txBody>
+                    <a:bodyPr wrap="square"/>
+                    <a:lstStyle/>
+                    <a:p>
+                      <a:pPr algn="ctr"/>
+                      <a:r>
+                        <a:rPr sz="1200" b="0">
+                          <a:solidFill>
+                            <a:srgbClr val="000000"/>
+                          </a:solidFill>
+                          <a:latin typeface="Arial"/>
+                          <a:ea typeface="Arial"/>
+                          <a:cs typeface="Arial"/>
+                        </a:rPr>
+                        <a:t>2 (10.0%)</a:t>
+                      </a:r>
+                    </a:p>
+                  </a:txBody>
+                  <a:tcPr marL="91440" marR="91440" marT="36576" marB="36576">
+                    <a:lnL cap="flat" cmpd="sng" algn="ctr" w="0">
+                      <a:noFill/>
+                    </a:lnL>
+                    <a:lnR cap="flat" cmpd="sng" algn="ctr" w="0">
+                      <a:noFill/>
+                    </a:lnR>
+                    <a:lnT cap="flat" cmpd="sng" algn="ctr" w="0">
+                      <a:noFill/>
+                    </a:lnT>
+                    <a:lnB cap="flat" cmpd="sng" algn="ctr" w="9525">
+                      <a:solidFill>
+                        <a:srgbClr val="999999"/>
+                      </a:solidFill>
+                      <a:prstDash val="solid"/>
+                    </a:lnB>
+                    <a:solidFill>
+                      <a:srgbClr val="FFFFFF"/>
+                    </a:solidFill>
+                  </a:tcPr>
+                </a:tc>
+                <a:tc>
+                  <a:txBody>
+                    <a:bodyPr wrap="square"/>
+                    <a:lstStyle/>
+                    <a:p>
+                      <a:pPr algn="ctr"/>
+                      <a:r>
+                        <a:rPr sz="1200" b="0">
+                          <a:solidFill>
+                            <a:srgbClr val="000000"/>
+                          </a:solidFill>
+                          <a:latin typeface="Arial"/>
+                          <a:ea typeface="Arial"/>
+                          <a:cs typeface="Arial"/>
+                        </a:rPr>
+                        <a:t>p = 0.568</a:t>
+                      </a:r>
+                    </a:p>
+                  </a:txBody>
+                  <a:tcPr marL="91440" marR="91440" marT="36576" marB="36576">
+                    <a:lnL cap="flat" cmpd="sng" algn="ctr" w="0">
+                      <a:noFill/>
+                    </a:lnL>
+                    <a:lnR cap="flat" cmpd="sng" algn="ctr" w="0">
+                      <a:noFill/>
+                    </a:lnR>
+                    <a:lnT cap="flat" cmpd="sng" algn="ctr" w="0">
+                      <a:noFill/>
+                    </a:lnT>
+                    <a:lnB cap="flat" cmpd="sng" algn="ctr" w="9525">
+                      <a:solidFill>
+                        <a:srgbClr val="999999"/>
+                      </a:solidFill>
+                      <a:prstDash val="solid"/>
+                    </a:lnB>
+                    <a:solidFill>
+                      <a:srgbClr val="FFFFFF"/>
+                    </a:solidFill>
+                  </a:tcPr>
+                </a:tc>
+              </a:tr>
+              <a:tr h="311726">
+                <a:tc>
+                  <a:txBody>
+                    <a:bodyPr wrap="square"/>
+                    <a:lstStyle/>
+                    <a:p>
+                      <a:pPr algn="l"/>
+                      <a:r>
+                        <a:rPr sz="1200" b="0">
+                          <a:solidFill>
+                            <a:srgbClr val="000000"/>
+                          </a:solidFill>
+                          <a:latin typeface="Arial"/>
+                          <a:ea typeface="Arial"/>
+                          <a:cs typeface="Arial"/>
+                        </a:rPr>
+                        <a:t>意欲低下</a:t>
+                      </a:r>
+                    </a:p>
+                  </a:txBody>
+                  <a:tcPr marL="91440" marR="91440" marT="36576" marB="36576">
+                    <a:lnL cap="flat" cmpd="sng" algn="ctr" w="0">
+                      <a:noFill/>
+                    </a:lnL>
+                    <a:lnR cap="flat" cmpd="sng" algn="ctr" w="0">
+                      <a:noFill/>
+                    </a:lnR>
+                    <a:lnT cap="flat" cmpd="sng" algn="ctr" w="0">
+                      <a:noFill/>
+                    </a:lnT>
+                    <a:lnB cap="flat" cmpd="sng" algn="ctr" w="9525">
+                      <a:solidFill>
+                        <a:srgbClr val="999999"/>
+                      </a:solidFill>
+                      <a:prstDash val="solid"/>
+                    </a:lnB>
+                    <a:solidFill>
+                      <a:srgbClr val="FFFFFF"/>
+                    </a:solidFill>
+                  </a:tcPr>
+                </a:tc>
+                <a:tc>
+                  <a:txBody>
+                    <a:bodyPr wrap="square"/>
+                    <a:lstStyle/>
+                    <a:p>
+                      <a:pPr algn="ctr"/>
+                      <a:r>
+                        <a:rPr sz="1200" b="0">
+                          <a:solidFill>
+                            <a:srgbClr val="000000"/>
+                          </a:solidFill>
+                          <a:latin typeface="Arial"/>
+                          <a:ea typeface="Arial"/>
+                          <a:cs typeface="Arial"/>
+                        </a:rPr>
+                        <a:t>8 (27.6%)</a:t>
+                      </a:r>
+                    </a:p>
+                  </a:txBody>
+                  <a:tcPr marL="91440" marR="91440" marT="36576" marB="36576">
+                    <a:lnL cap="flat" cmpd="sng" algn="ctr" w="0">
+                      <a:noFill/>
+                    </a:lnL>
+                    <a:lnR cap="flat" cmpd="sng" algn="ctr" w="0">
+                      <a:noFill/>
+                    </a:lnR>
+                    <a:lnT cap="flat" cmpd="sng" algn="ctr" w="0">
+                      <a:noFill/>
+                    </a:lnT>
+                    <a:lnB cap="flat" cmpd="sng" algn="ctr" w="9525">
+                      <a:solidFill>
+                        <a:srgbClr val="999999"/>
+                      </a:solidFill>
+                      <a:prstDash val="solid"/>
+                    </a:lnB>
+                    <a:solidFill>
+                      <a:srgbClr val="FFFFFF"/>
+                    </a:solidFill>
+                  </a:tcPr>
+                </a:tc>
+                <a:tc>
+                  <a:txBody>
+                    <a:bodyPr wrap="square"/>
+                    <a:lstStyle/>
+                    <a:p>
+                      <a:pPr algn="ctr"/>
+                      <a:r>
+                        <a:rPr sz="1200" b="0">
+                          <a:solidFill>
+                            <a:srgbClr val="000000"/>
+                          </a:solidFill>
+                          <a:latin typeface="Arial"/>
+                          <a:ea typeface="Arial"/>
+                          <a:cs typeface="Arial"/>
+                        </a:rPr>
+                        <a:t>3 (33.3%)</a:t>
+                      </a:r>
+                    </a:p>
+                  </a:txBody>
+                  <a:tcPr marL="91440" marR="91440" marT="36576" marB="36576">
+                    <a:lnL cap="flat" cmpd="sng" algn="ctr" w="0">
+                      <a:noFill/>
+                    </a:lnL>
+                    <a:lnR cap="flat" cmpd="sng" algn="ctr" w="0">
+                      <a:noFill/>
+                    </a:lnR>
+                    <a:lnT cap="flat" cmpd="sng" algn="ctr" w="0">
+                      <a:noFill/>
+                    </a:lnT>
+                    <a:lnB cap="flat" cmpd="sng" algn="ctr" w="9525">
+                      <a:solidFill>
+                        <a:srgbClr val="999999"/>
+                      </a:solidFill>
+                      <a:prstDash val="solid"/>
+                    </a:lnB>
+                    <a:solidFill>
+                      <a:srgbClr val="FFFFFF"/>
+                    </a:solidFill>
+                  </a:tcPr>
+                </a:tc>
+                <a:tc>
+                  <a:txBody>
+                    <a:bodyPr wrap="square"/>
+                    <a:lstStyle/>
+                    <a:p>
+                      <a:pPr algn="ctr"/>
+                      <a:r>
+                        <a:rPr sz="1200" b="0">
+                          <a:solidFill>
+                            <a:srgbClr val="000000"/>
+                          </a:solidFill>
+                          <a:latin typeface="Arial"/>
+                          <a:ea typeface="Arial"/>
+                          <a:cs typeface="Arial"/>
+                        </a:rPr>
+                        <a:t>5 (25.0%)</a:t>
+                      </a:r>
+                    </a:p>
+                  </a:txBody>
+                  <a:tcPr marL="91440" marR="91440" marT="36576" marB="36576">
+                    <a:lnL cap="flat" cmpd="sng" algn="ctr" w="0">
+                      <a:noFill/>
+                    </a:lnL>
+                    <a:lnR cap="flat" cmpd="sng" algn="ctr" w="0">
+                      <a:noFill/>
+                    </a:lnR>
+                    <a:lnT cap="flat" cmpd="sng" algn="ctr" w="0">
+                      <a:noFill/>
+                    </a:lnT>
+                    <a:lnB cap="flat" cmpd="sng" algn="ctr" w="9525">
+                      <a:solidFill>
+                        <a:srgbClr val="999999"/>
+                      </a:solidFill>
+                      <a:prstDash val="solid"/>
+                    </a:lnB>
+                    <a:solidFill>
+                      <a:srgbClr val="FFFFFF"/>
+                    </a:solidFill>
+                  </a:tcPr>
+                </a:tc>
+                <a:tc>
+                  <a:txBody>
+                    <a:bodyPr wrap="square"/>
+                    <a:lstStyle/>
+                    <a:p>
+                      <a:pPr algn="ctr"/>
+                      <a:r>
+                        <a:rPr sz="1200" b="0">
+                          <a:solidFill>
+                            <a:srgbClr val="000000"/>
+                          </a:solidFill>
+                          <a:latin typeface="Arial"/>
+                          <a:ea typeface="Arial"/>
+                          <a:cs typeface="Arial"/>
+                        </a:rPr>
+                        <a:t>p = 0.675</a:t>
+                      </a:r>
+                    </a:p>
+                  </a:txBody>
+                  <a:tcPr marL="91440" marR="91440" marT="36576" marB="36576">
+                    <a:lnL cap="flat" cmpd="sng" algn="ctr" w="0">
+                      <a:noFill/>
+                    </a:lnL>
+                    <a:lnR cap="flat" cmpd="sng" algn="ctr" w="0">
+                      <a:noFill/>
+                    </a:lnR>
+                    <a:lnT cap="flat" cmpd="sng" algn="ctr" w="0">
+                      <a:noFill/>
+                    </a:lnT>
+                    <a:lnB cap="flat" cmpd="sng" algn="ctr" w="9525">
+                      <a:solidFill>
+                        <a:srgbClr val="999999"/>
+                      </a:solidFill>
+                      <a:prstDash val="solid"/>
+                    </a:lnB>
+                    <a:solidFill>
+                      <a:srgbClr val="FFFFFF"/>
+                    </a:solidFill>
+                  </a:tcPr>
+                </a:tc>
+              </a:tr>
+            </a:tbl>
+          </a:graphicData>
+        </a:graphic>
+      </p:graphicFrame>
+      <p:sp>
+        <p:nvSpPr>
+          <p:cNvPr id="7" name="TextBox 6"/>
+          <p:cNvSpPr txBox="1"/>
+          <p:nvPr/>
+        </p:nvSpPr>
+        <p:spPr>
+          <a:xfrm>
+            <a:off x="457200" y="6126480"/>
+            <a:ext cx="11247120" cy="685800"/>
+          </a:xfrm>
+          <a:prstGeom prst="rect">
+            <a:avLst/>
+          </a:prstGeom>
+          <a:noFill/>
+        </p:spPr>
+        <p:txBody>
+          <a:bodyPr wrap="square" lIns="0" rIns="0" tIns="0" bIns="0">
+            <a:spAutoFit/>
+          </a:bodyPr>
+          <a:lstStyle/>
+          <a:p>
+            <a:pPr>
+              <a:lnSpc>
+                <a:spcPct val="115000"/>
+              </a:lnSpc>
+            </a:pPr>
+            <a:r>
+              <a:rPr sz="1050" b="0">
+                <a:solidFill>
+                  <a:srgbClr val="1A1A1A"/>
+                </a:solidFill>
+                <a:latin typeface="Arial"/>
+                <a:ea typeface="Arial"/>
+                <a:cs typeface="Arial"/>
+              </a:rPr>
+              <a:t>数値は平均値±標準偏差または症例数(%)を示す。年齢・性別・HDS-R合計点はレカネマブ患者ID一覧より、他はxlsx（0か月＝ベースライン値）より算出。</a:t>
+            </a:r>
+          </a:p>
+          <a:p>
+            <a:pPr>
+              <a:lnSpc>
+                <a:spcPct val="115000"/>
+              </a:lnSpc>
+            </a:pPr>
+            <a:r>
+              <a:rPr sz="1050" b="0">
+                <a:solidFill>
+                  <a:srgbClr val="1A1A1A"/>
+                </a:solidFill>
+                <a:latin typeface="Arial"/>
+                <a:ea typeface="Arial"/>
+                <a:cs typeface="Arial"/>
+              </a:rPr>
+              <a:t>群間のp値は探索的な参考値（多重比較未補正）。連続変数はWelchのt検定、二値変数はFisher正確検定。Global CDRは該当例数が少なく検定していない。</a:t>
+            </a:r>
+          </a:p>
+          <a:p>
+            <a:pPr>
+              <a:lnSpc>
+                <a:spcPct val="115000"/>
+              </a:lnSpc>
+            </a:pPr>
+            <a:r>
+              <a:rPr sz="1050" b="0">
+                <a:solidFill>
+                  <a:srgbClr val="1A1A1A"/>
+                </a:solidFill>
+                <a:latin typeface="Arial"/>
+                <a:ea typeface="Arial"/>
+                <a:cs typeface="Arial"/>
+              </a:rPr>
+              <a:t>MoCA-J（n=28、1例欠測：L9）、Global CDR／CDR-SB（評価済みn=27、2例欠測：L8・L19、いずれも原資料でCDR用紙が未確認）。</a:t>
             </a:r>
           </a:p>
         </p:txBody>
